--- a/en/slides/11-Computer_Architecture-Combinational_Machines-Code.pptx
+++ b/en/slides/11-Computer_Architecture-Combinational_Machines-Code.pptx
@@ -122,29 +122,45 @@
   <p:extLst>
     <p:ext uri="{521415D9-36F7-43E2-AB2F-B90AF26B5E84}">
       <p14:sectionLst xmlns:p14="http://schemas.microsoft.com/office/powerpoint/2010/main">
-        <p14:section name="Opening" id="{a4ddbb7a-9b44-d143-04ad-6627a0c23f95}">
+        <p14:section name="Opening" id="{9885c78d-b06f-4a67-3de0-514037c72ef6}">
           <p14:sldIdLst>
             <p14:sldId id="256"/>
             <p14:sldId id="257"/>
           </p14:sldIdLst>
         </p14:section>
-        <p14:section name="The listings" id="{11db34a5-a3d1-3df3-b613-5b738587800e}">
+        <p14:section name="Warm-up on the machine" id="{2f3196de-8e78-51c6-c6f5-aad585763ca1}">
           <p14:sldIdLst>
             <p14:sldId id="258"/>
+          </p14:sldIdLst>
+        </p14:section>
+        <p14:section name="Decoders and encoders" id="{73500c15-000f-92c8-8d7f-3a6163363ec5}">
+          <p14:sldIdLst>
             <p14:sldId id="259"/>
+          </p14:sldIdLst>
+        </p14:section>
+        <p14:section name="Multiplexers and demultiplexers" id="{9fe44d93-00f0-456a-3a94-b3cafe7d4cef}">
+          <p14:sldIdLst>
             <p14:sldId id="260"/>
+          </p14:sldIdLst>
+        </p14:section>
+        <p14:section name="Comparing and checking" id="{0fd83074-7ec4-98ea-2b9b-5664bec7655d}">
+          <p14:sldIdLst>
             <p14:sldId id="261"/>
+          </p14:sldIdLst>
+        </p14:section>
+        <p14:section name="The arithmetic logic unit" id="{29498041-11d0-f415-73ca-a593d7319109}">
+          <p14:sldIdLst>
             <p14:sldId id="262"/>
           </p14:sldIdLst>
         </p14:section>
-        <p14:section name="The complete program" id="{519a5629-7757-5cbc-6945-f3b15c6ebad6}">
+        <p14:section name="The complete program" id="{70469614-c3e5-32a4-bdbf-2404c5dd8b55}">
           <p14:sldIdLst>
             <p14:sldId id="263"/>
             <p14:sldId id="264"/>
             <p14:sldId id="265"/>
           </p14:sldIdLst>
         </p14:section>
-        <p14:section name="Run it and test it" id="{aa6b37c3-2899-b3e5-75fe-048f07d178d5}">
+        <p14:section name="Run it and test it" id="{3a4873a0-e141-9241-627d-c61a619178e1}">
           <p14:sldIdLst>
             <p14:sldId id="266"/>
             <p14:sldId id="267"/>
@@ -153,7 +169,7 @@
             <p14:sldId id="270"/>
           </p14:sldIdLst>
         </p14:section>
-        <p14:section name="Exercises" id="{966a069d-9c5a-304c-ed47-ad10a8c8f7c9}">
+        <p14:section name="Exercises" id="{2725dfab-192d-ff3e-6cc3-2492423fed37}">
           <p14:sldIdLst>
             <p14:sldId id="271"/>
           </p14:sldIdLst>
@@ -2871,7 +2887,63 @@
       </p:sp>
       <p:sp>
         <p:nvSpPr>
-          <p:cNvPr id="11" name="Shape 9"/>
+          <p:cNvPr id="11" name="Text 9"/>
+          <p:cNvSpPr txBox="1"/>
+          <p:nvPr/>
+        </p:nvSpPr>
+        <p:spPr>
+          <a:xfrm>
+            <a:off x="4693615" y="566928"/>
+            <a:ext cx="6949440" cy="640080"/>
+          </a:xfrm>
+          <a:prstGeom prst="rect">
+            <a:avLst/>
+          </a:prstGeom>
+          <a:noFill/>
+          <a:ln/>
+        </p:spPr>
+        <p:txBody>
+          <a:bodyPr wrap="square" lIns="0" tIns="0" rIns="0" bIns="0" rtlCol="0" anchor="t"/>
+          <a:lstStyle/>
+          <a:p>
+            <a:pPr algn="r" indent="0" marL="0">
+              <a:buNone/>
+            </a:pPr>
+            <a:r>
+              <a:rPr lang="en-US" sz="1300" dirty="0">
+                <a:solidFill>
+                  <a:srgbClr val="CFE3EA"/>
+                </a:solidFill>
+                <a:latin typeface="Calibri" pitchFamily="34" charset="0"/>
+                <a:ea typeface="Calibri" pitchFamily="34" charset="-122"/>
+                <a:cs typeface="Calibri" pitchFamily="34" charset="-120"/>
+              </a:rPr>
+              <a:t>Code deck. The concepts, the figures and the questions are in the lecture deck:</a:t>
+            </a:r>
+            <a:endParaRPr lang="en-US" sz="1300" dirty="0"/>
+          </a:p>
+          <a:p>
+            <a:pPr algn="r" indent="0" marL="0">
+              <a:buNone/>
+            </a:pPr>
+            <a:r>
+              <a:rPr lang="en-US" sz="1300" dirty="0">
+                <a:solidFill>
+                  <a:srgbClr val="CFE3EA"/>
+                </a:solidFill>
+                <a:latin typeface="Calibri" pitchFamily="34" charset="0"/>
+                <a:ea typeface="Calibri" pitchFamily="34" charset="-122"/>
+                <a:cs typeface="Calibri" pitchFamily="34" charset="-120"/>
+              </a:rPr>
+              <a:t>11-Computer_Architecture-Combinational_Machines.pptx</a:t>
+            </a:r>
+            <a:endParaRPr lang="en-US" sz="1300" dirty="0"/>
+          </a:p>
+        </p:txBody>
+      </p:sp>
+      <p:sp>
+        <p:nvSpPr>
+          <p:cNvPr id="12" name="Shape 10"/>
           <p:cNvSpPr/>
           <p:nvPr/>
         </p:nvSpPr>
@@ -2898,7 +2970,7 @@
       </p:sp>
       <p:pic>
         <p:nvPicPr>
-          <p:cNvPr id="12" name="Image 0" descr="/Users/raffaelemontella/devel/riscv-prg32/computer-architecture-with-prg32/tools/assets/game_breakout.png">    </p:cNvPr>
+          <p:cNvPr id="13" name="Image 0" descr="/Users/raffaelemontella/devel/riscv-prg32/computer-architecture-with-prg32/tools/assets/game_breakout.png">    </p:cNvPr>
           <p:cNvPicPr>
             <a:picLocks noChangeAspect="1"/>
           </p:cNvPicPr>

--- a/en/slides/11-Computer_Architecture-Combinational_Machines-Code.pptx
+++ b/en/slides/11-Computer_Architecture-Combinational_Machines-Code.pptx
@@ -122,45 +122,45 @@
   <p:extLst>
     <p:ext uri="{521415D9-36F7-43E2-AB2F-B90AF26B5E84}">
       <p14:sectionLst xmlns:p14="http://schemas.microsoft.com/office/powerpoint/2010/main">
-        <p14:section name="Opening" id="{9885c78d-b06f-4a67-3de0-514037c72ef6}">
+        <p14:section name="Opening" id="{fe16a62c-739c-0bd1-1bed-60b16071f147}">
           <p14:sldIdLst>
             <p14:sldId id="256"/>
             <p14:sldId id="257"/>
           </p14:sldIdLst>
         </p14:section>
-        <p14:section name="Warm-up on the machine" id="{2f3196de-8e78-51c6-c6f5-aad585763ca1}">
+        <p14:section name="Warm-up on the machine" id="{3760031d-a6c8-535b-9442-21da3a6d9292}">
           <p14:sldIdLst>
             <p14:sldId id="258"/>
           </p14:sldIdLst>
         </p14:section>
-        <p14:section name="Decoders and encoders" id="{73500c15-000f-92c8-8d7f-3a6163363ec5}">
+        <p14:section name="Decoders and encoders" id="{927138e5-9e9c-afcb-5f3a-e925a93b4425}">
           <p14:sldIdLst>
             <p14:sldId id="259"/>
           </p14:sldIdLst>
         </p14:section>
-        <p14:section name="Multiplexers and demultiplexers" id="{9fe44d93-00f0-456a-3a94-b3cafe7d4cef}">
+        <p14:section name="Multiplexers and demultiplexers" id="{a137d3b3-437e-d1fd-1828-fae37301856c}">
           <p14:sldIdLst>
             <p14:sldId id="260"/>
           </p14:sldIdLst>
         </p14:section>
-        <p14:section name="Comparing and checking" id="{0fd83074-7ec4-98ea-2b9b-5664bec7655d}">
+        <p14:section name="Comparing and checking" id="{76be95a5-a696-b03b-795d-4a87c19d4a51}">
           <p14:sldIdLst>
             <p14:sldId id="261"/>
           </p14:sldIdLst>
         </p14:section>
-        <p14:section name="The arithmetic logic unit" id="{29498041-11d0-f415-73ca-a593d7319109}">
+        <p14:section name="The arithmetic logic unit" id="{3fb44611-d72e-9a7d-ae76-007f53efa2e9}">
           <p14:sldIdLst>
             <p14:sldId id="262"/>
           </p14:sldIdLst>
         </p14:section>
-        <p14:section name="The complete program" id="{70469614-c3e5-32a4-bdbf-2404c5dd8b55}">
+        <p14:section name="The complete program" id="{77192457-ce09-7896-9c6d-5e0114ccd41c}">
           <p14:sldIdLst>
             <p14:sldId id="263"/>
             <p14:sldId id="264"/>
             <p14:sldId id="265"/>
           </p14:sldIdLst>
         </p14:section>
-        <p14:section name="Run it and test it" id="{3a4873a0-e141-9241-627d-c61a619178e1}">
+        <p14:section name="Run it and test it" id="{d0d7e8ce-d825-a446-be72-6777824253a6}">
           <p14:sldIdLst>
             <p14:sldId id="266"/>
             <p14:sldId id="267"/>
@@ -169,7 +169,7 @@
             <p14:sldId id="270"/>
           </p14:sldIdLst>
         </p14:section>
-        <p14:section name="Exercises" id="{2725dfab-192d-ff3e-6cc3-2492423fed37}">
+        <p14:section name="Exercises" id="{ce163c1f-87a4-6649-4139-0ca02517e7ec}">
           <p14:sldIdLst>
             <p14:sldId id="271"/>
           </p14:sldIdLst>
@@ -578,7 +578,9 @@
           <a:p>
             <a:r>
               <a:rPr lang="en-US" dirty="0"/>
-              <a:t>This is the code deck of Lecture 11. The lecture deck holds the concepts; this one holds everything you type and run: the listings with their explanation, the complete program, what it shows, and the way to test it on each of the three hosts.</a:t>
+              <a:t>This is the code deck of Lecture 11. The lecture deck holds the concepts; this one holds everything you type and run: the listings with their explanation, the complete program, what it shows, and the way to test it on each of the three hosts.
+Learning status: UNDERSTAND NOW, by the end of this lecture you explain it, trace it and apply it on your own; USE NOW, you follow and use the recipe today; how it works inside is explained later, or is not part of the course; UNDERSTAND LATER, recognise the name and what it is for; a later lecture explains it. A slide without a badge is context: a story, an example, a question, an exercise.
+Learning status of this lecture. UNDERSTAND NOW: multiplexers; combinational machines; codes; decoders and encoders; comparators and parity; the ALU. USE NOW: the complete program, the PRG32 tools (used, not studied, in this course). UNDERSTAND LATER: finite-state machines (Lecture 13). A slide without a badge is context: a story, an example, a question, an exercise.</a:t>
             </a:r>
             <a:endParaRPr lang="en-US" dirty="0"/>
           </a:p>
@@ -667,6 +669,7 @@
             <a:r>
               <a:rPr lang="en-US" dirty="0"/>
               <a:t>One page of the complete program, exactly as it is in the repository. Read it from the top: the header says what the program shows and how to build it; the three functions init, update and draw follow, then the data. Lines that you met in the listings of the lecture have the same comments here.
+USE NOW: the complete program (used, not studied, in this course).
 For the lecturer: code/l11.S, as built and run by the tests. The comments are part of the program: read them with the code.</a:t>
             </a:r>
             <a:endParaRPr lang="en-US" dirty="0"/>
@@ -845,6 +848,7 @@
             <a:r>
               <a:rPr lang="en-US" dirty="0"/>
               <a:t>The quickest way: PRG32-QT on your own computer. Four steps, each with its command. PRG32-QT behaves like a board on port 8080, which is why the upload command says esp32c6. With debug mode enabled you can stop at any instruction and read registers and memory.
+USE NOW: the PRG32 tools (used, not studied, in this course).
 For the lecturer: Run by the tests: the cartridge of this slide is built with this command and executed on the headless runner of PRG32-QT. Without the toolchain: import the .prg32 file in PRG32-QT and choose Run Cartridge. Keys: arrows or WASD for the joystick, Z or J for A, X or K for B, Enter for Start, Escape to go back to Setup.</a:t>
             </a:r>
             <a:endParaRPr lang="en-US" dirty="0"/>
@@ -934,6 +938,7 @@
             <a:r>
               <a:rPr lang="en-US" dirty="0"/>
               <a:t>The same program on the emulator. QEMU runs the real firmware on an emulated chip, so the cartridge must be built for the architecture qemu. Stage the cartridge while QEMU is closed. The firmware opens on the Setup menu: choose Run Cartridge and the slot. Remember that the keyboard is read by the terminal, not by the window with the picture.
+USE NOW: the PRG32 tools (used, not studied, in this course).
 For the lecturer: Checked by the tests up to the staging: the cartridge is built for the architecture qemu and accepted into the flash image of the emulator. What the emulator then shows is not checked automatically: Espressif QEMU needs its window. Since October 2026 the firmware starts on Setup: choose Run Cartridge, then cart0.</a:t>
             </a:r>
             <a:endParaRPr lang="en-US" dirty="0"/>
@@ -1023,6 +1028,7 @@
             <a:r>
               <a:rPr lang="en-US" dirty="0"/>
               <a:t>The same program on the kit. The firmware is written once, through USB; after that cartridges travel over Wi-Fi. The upload command is the one used for PRG32-QT with the address of the board. This is the only host that the automatic tests do not run: try it, and report what you see.
+USE NOW: the PRG32 tools (used, not studied, in this course).
 For the lecturer: Not run by the tests: there is no board on the test machine. The cartridge for the architecture esp32c6 is built by the tests; the steps are those of the PRG32 documentation. If the serial port is not found pass it explicitly. To use the Wi-Fi of the classroom: python3 -m prg32 wifi set --ssid NAME --password PASSWORD --mode sta.</a:t>
             </a:r>
             <a:endParaRPr lang="en-US" dirty="0"/>
@@ -1112,6 +1118,7 @@
             <a:r>
               <a:rPr lang="en-US" dirty="0"/>
               <a:t>The five most common symptoms, what each means, and what to do. Read the message before changing anything: it nearly always names the cause.
+USE NOW: the PRG32 tools (used, not studied, in this course).
 For the lecturer: The first three rows cover most cases. When asking for help, paste the command and the whole message as text. docs/usage/troubleshooting.md of the PRG32 repository has the complete list.</a:t>
             </a:r>
             <a:endParaRPr lang="en-US" dirty="0"/>
@@ -1379,6 +1386,7 @@
             <a:r>
               <a:rPr lang="en-US" dirty="0"/>
               <a:t>a0 holds a number from 0 to 3. The four instructions are the array access of Lecture 04: load the address of the table, multiply the selector by 4, add, and load the selected word. The same selector always gives the same colour, and nothing is remembered from one use to the next. This behaviour, outputs that depend only on the present inputs, defines the machines of today. In hardware this particular one is a multiplexer: four data inputs, two selection bits, one output.
+UNDERSTAND NOW: multiplexers.
 For the lecturer: The array access of Lecture 04, read as a circuit. In the processor the selection is done by gates in well under a nanosecond; here it takes four instructions.</a:t>
             </a:r>
             <a:endParaRPr lang="en-US" dirty="0"/>
@@ -1468,6 +1476,7 @@
             <a:r>
               <a:rPr lang="en-US" dirty="0"/>
               <a:t>A decoder at work in the processor. The instruction addi t1, t1, 1 contains a 5-bit field, rd, with the number of the destination register: 00110, that is 6, the register t1. A 5-to-32 decoder turns those five bits into thirty-two write-enable lines, of which only the sixth is active: only that register receives the result. The same instruction contains two more register numbers, which select the registers to be read.
+UNDERSTAND NOW: decoders and encoders.
 For the lecturer: The instruction of Lecture 02. Grey fields are not involved. The write enable of x0 is simply not connected: x0 always reads zero. Reading uses multiplexers, shown in a few slides.</a:t>
             </a:r>
             <a:endParaRPr lang="en-US" dirty="0"/>
@@ -1557,6 +1566,7 @@
             <a:r>
               <a:rPr lang="en-US" dirty="0"/>
               <a:t>A multiplexer at work in the processor. add t2, t0, t1 adds two registers; addi t2, t0, 5 adds a register and a constant taken from the instruction. Both use the same adder. A multiplexer in front of the second input of the ALU chooses between the value of a register and the constant: its selection line is 0 for add and 1 for addi. It is a multiplexer on whole words: thirty-two one-bit multiplexers with a common selection line. Reading a register is a multiplexer too.
+UNDERSTAND NOW: multiplexers.
 For the lecturer: In the textbook datapath of Patterson and Hennessy the selection signal is called ALUSrc. A gate applied to every bit of a word with a common control is a word gate (porta di parola).</a:t>
             </a:r>
             <a:endParaRPr lang="en-US" dirty="0"/>
@@ -1646,6 +1656,7 @@
             <a:r>
               <a:rPr lang="en-US" dirty="0"/>
               <a:t>A parity network in software, for one byte. Each pair of instructions shifts the value right and combines it with itself by XOR: the first fold brings eight bits onto four, the second four onto two, the third two onto one. The last instruction keeps only the lowest bit, which is the parity. In hardware the same three levels are a tree of seven XOR gates. Trace it by hand with 0x53, which has four 1s, and with 0x13, which has three.
+UNDERSTAND NOW: comparators and parity.
 For the lecturer: Written for this lecture. Trace it with 0x53 = 0101 0011 (four 1s, result 0) and with 0x13 = 0001 0011 (three 1s, result 1). In hardware the three levels are a tree of seven XOR gates.</a:t>
             </a:r>
             <a:endParaRPr lang="en-US" dirty="0"/>
@@ -1735,6 +1746,7 @@
             <a:r>
               <a:rPr lang="en-US" dirty="0"/>
               <a:t>How an instruction chooses the operation. The 3-bit field funct3 of the instruction is a compact code: 000 for sum or difference, 001 for shift left, 100 for XOR, 110 for OR, 111 for AND. A small decoder turns it into the selection lines of the multiplexer of the ALU. Where two instructions share a value, such as add and sub, one more bit elsewhere in the instruction distinguishes them. A code, a decoder, a multiplexer: the whole lecture in one table.
+UNDERSTAND NOW: the ALU.
 For the lecturer: funct3 is the 3-bit field of the instruction seen in Lecture 02 (bits 14 to 12). Three bits, eight code words: a compact code that a small decoder turns into the selection lines of the ALU multiplexer.</a:t>
             </a:r>
             <a:endParaRPr lang="en-US" dirty="0"/>
@@ -1824,6 +1836,7 @@
             <a:r>
               <a:rPr lang="en-US" dirty="0"/>
               <a:t>One page of the complete program, exactly as it is in the repository. Read it from the top: the header says what the program shows and how to build it; the three functions init, update and draw follow, then the data. Lines that you met in the listings of the lecture have the same comments here.
+USE NOW: the complete program (used, not studied, in this course).
 For the lecturer: code/l11.S, as built and run by the tests. The comments are part of the program: read them with the code.</a:t>
             </a:r>
             <a:endParaRPr lang="en-US" dirty="0"/>
@@ -1913,6 +1926,7 @@
             <a:r>
               <a:rPr lang="en-US" dirty="0"/>
               <a:t>One page of the complete program, exactly as it is in the repository. Read it from the top: the header says what the program shows and how to build it; the three functions init, update and draw follow, then the data. Lines that you met in the listings of the lecture have the same comments here.
+USE NOW: the complete program (used, not studied, in this course).
 For the lecturer: code/l11.S, as built and run by the tests. The comments are part of the program: read them with the code.</a:t>
             </a:r>
             <a:endParaRPr lang="en-US" dirty="0"/>
@@ -2994,6 +3008,420 @@
       </p:pic>
       <p:sp>
         <p:nvSpPr>
+          <p:cNvPr id="14" name="Shape 11"/>
+          <p:cNvSpPr/>
+          <p:nvPr/>
+        </p:nvSpPr>
+        <p:spPr>
+          <a:xfrm>
+            <a:off x="9690303" y="91440"/>
+            <a:ext cx="1952752" cy="274320"/>
+          </a:xfrm>
+          <a:prstGeom prst="rect">
+            <a:avLst/>
+          </a:prstGeom>
+          <a:solidFill>
+            <a:srgbClr val="F3E8FF"/>
+          </a:solidFill>
+          <a:ln w="12700">
+            <a:solidFill>
+              <a:srgbClr val="7E22CE"/>
+            </a:solidFill>
+            <a:prstDash val="dash"/>
+          </a:ln>
+        </p:spPr>
+      </p:sp>
+      <p:sp>
+        <p:nvSpPr>
+          <p:cNvPr id="15" name="Shape 12"/>
+          <p:cNvSpPr/>
+          <p:nvPr/>
+        </p:nvSpPr>
+        <p:spPr>
+          <a:xfrm>
+            <a:off x="9717735" y="128016"/>
+            <a:ext cx="45720" cy="45720"/>
+          </a:xfrm>
+          <a:prstGeom prst="rect">
+            <a:avLst/>
+          </a:prstGeom>
+          <a:solidFill>
+            <a:srgbClr val="7E22CE"/>
+          </a:solidFill>
+          <a:ln w="12700">
+            <a:solidFill>
+              <a:srgbClr val="7E22CE"/>
+            </a:solidFill>
+            <a:prstDash val="solid"/>
+          </a:ln>
+        </p:spPr>
+      </p:sp>
+      <p:sp>
+        <p:nvSpPr>
+          <p:cNvPr id="16" name="Shape 13"/>
+          <p:cNvSpPr/>
+          <p:nvPr/>
+        </p:nvSpPr>
+        <p:spPr>
+          <a:xfrm>
+            <a:off x="9717735" y="205740"/>
+            <a:ext cx="45720" cy="45720"/>
+          </a:xfrm>
+          <a:prstGeom prst="rect">
+            <a:avLst/>
+          </a:prstGeom>
+          <a:solidFill>
+            <a:srgbClr val="7E22CE"/>
+          </a:solidFill>
+          <a:ln w="12700">
+            <a:solidFill>
+              <a:srgbClr val="7E22CE"/>
+            </a:solidFill>
+            <a:prstDash val="solid"/>
+          </a:ln>
+        </p:spPr>
+      </p:sp>
+      <p:sp>
+        <p:nvSpPr>
+          <p:cNvPr id="17" name="Shape 14"/>
+          <p:cNvSpPr/>
+          <p:nvPr/>
+        </p:nvSpPr>
+        <p:spPr>
+          <a:xfrm>
+            <a:off x="9717735" y="283464"/>
+            <a:ext cx="45720" cy="45720"/>
+          </a:xfrm>
+          <a:prstGeom prst="rect">
+            <a:avLst/>
+          </a:prstGeom>
+          <a:solidFill>
+            <a:srgbClr val="7E22CE"/>
+          </a:solidFill>
+          <a:ln w="12700">
+            <a:solidFill>
+              <a:srgbClr val="7E22CE"/>
+            </a:solidFill>
+            <a:prstDash val="solid"/>
+          </a:ln>
+        </p:spPr>
+      </p:sp>
+      <p:pic>
+        <p:nvPicPr>
+          <p:cNvPr id="18" name="Image 1" descr="preencoded.png">    </p:cNvPr>
+          <p:cNvPicPr>
+            <a:picLocks noChangeAspect="1"/>
+          </p:cNvPicPr>
+          <p:nvPr/>
+        </p:nvPicPr>
+        <p:blipFill>
+          <a:blip r:embed="rId2"/>
+          <a:stretch>
+            <a:fillRect/>
+          </a:stretch>
+        </p:blipFill>
+        <p:spPr>
+          <a:xfrm>
+            <a:off x="9818319" y="128016"/>
+            <a:ext cx="201168" cy="201168"/>
+          </a:xfrm>
+          <a:prstGeom prst="rect">
+            <a:avLst/>
+          </a:prstGeom>
+        </p:spPr>
+      </p:pic>
+      <p:sp>
+        <p:nvSpPr>
+          <p:cNvPr id="19" name="Text 15"/>
+          <p:cNvSpPr txBox="1"/>
+          <p:nvPr/>
+        </p:nvSpPr>
+        <p:spPr>
+          <a:xfrm>
+            <a:off x="10074351" y="91440"/>
+            <a:ext cx="1532128" cy="274320"/>
+          </a:xfrm>
+          <a:prstGeom prst="rect">
+            <a:avLst/>
+          </a:prstGeom>
+          <a:noFill/>
+          <a:ln/>
+        </p:spPr>
+        <p:txBody>
+          <a:bodyPr wrap="square" lIns="0" tIns="0" rIns="0" bIns="0" rtlCol="0" anchor="ctr"/>
+          <a:lstStyle/>
+          <a:p>
+            <a:pPr indent="0" marL="0">
+              <a:buNone/>
+            </a:pPr>
+            <a:r>
+              <a:rPr lang="en-US" sz="1100" b="1" dirty="0">
+                <a:solidFill>
+                  <a:srgbClr val="6B21A8"/>
+                </a:solidFill>
+                <a:latin typeface="Calibri" pitchFamily="34" charset="0"/>
+                <a:ea typeface="Calibri" pitchFamily="34" charset="-122"/>
+                <a:cs typeface="Calibri" pitchFamily="34" charset="-120"/>
+              </a:rPr>
+              <a:t>UNDERSTAND LATER</a:t>
+            </a:r>
+            <a:endParaRPr lang="en-US" sz="1100" dirty="0"/>
+          </a:p>
+        </p:txBody>
+      </p:sp>
+      <p:sp>
+        <p:nvSpPr>
+          <p:cNvPr id="20" name="Shape 16"/>
+          <p:cNvSpPr/>
+          <p:nvPr/>
+        </p:nvSpPr>
+        <p:spPr>
+          <a:xfrm>
+            <a:off x="8407349" y="91440"/>
+            <a:ext cx="1173226" cy="274320"/>
+          </a:xfrm>
+          <a:prstGeom prst="rect">
+            <a:avLst/>
+          </a:prstGeom>
+          <a:solidFill>
+            <a:srgbClr val="FEF3C7"/>
+          </a:solidFill>
+          <a:ln w="12700">
+            <a:solidFill>
+              <a:srgbClr val="B45309"/>
+            </a:solidFill>
+            <a:prstDash val="solid"/>
+          </a:ln>
+        </p:spPr>
+      </p:sp>
+      <p:sp>
+        <p:nvSpPr>
+          <p:cNvPr id="21" name="Shape 17"/>
+          <p:cNvSpPr/>
+          <p:nvPr/>
+        </p:nvSpPr>
+        <p:spPr>
+          <a:xfrm>
+            <a:off x="8407349" y="91440"/>
+            <a:ext cx="27432" cy="274320"/>
+          </a:xfrm>
+          <a:prstGeom prst="rect">
+            <a:avLst/>
+          </a:prstGeom>
+          <a:solidFill>
+            <a:srgbClr val="B45309"/>
+          </a:solidFill>
+          <a:ln w="12700">
+            <a:solidFill>
+              <a:srgbClr val="B45309"/>
+            </a:solidFill>
+            <a:prstDash val="solid"/>
+          </a:ln>
+        </p:spPr>
+      </p:sp>
+      <p:sp>
+        <p:nvSpPr>
+          <p:cNvPr id="22" name="Shape 18"/>
+          <p:cNvSpPr/>
+          <p:nvPr/>
+        </p:nvSpPr>
+        <p:spPr>
+          <a:xfrm>
+            <a:off x="8462213" y="91440"/>
+            <a:ext cx="27432" cy="274320"/>
+          </a:xfrm>
+          <a:prstGeom prst="rect">
+            <a:avLst/>
+          </a:prstGeom>
+          <a:solidFill>
+            <a:srgbClr val="B45309"/>
+          </a:solidFill>
+          <a:ln w="12700">
+            <a:solidFill>
+              <a:srgbClr val="B45309"/>
+            </a:solidFill>
+            <a:prstDash val="solid"/>
+          </a:ln>
+        </p:spPr>
+      </p:sp>
+      <p:pic>
+        <p:nvPicPr>
+          <p:cNvPr id="23" name="Image 2" descr="preencoded.png">    </p:cNvPr>
+          <p:cNvPicPr>
+            <a:picLocks noChangeAspect="1"/>
+          </p:cNvPicPr>
+          <p:nvPr/>
+        </p:nvPicPr>
+        <p:blipFill>
+          <a:blip r:embed="rId3"/>
+          <a:stretch>
+            <a:fillRect/>
+          </a:stretch>
+        </p:blipFill>
+        <p:spPr>
+          <a:xfrm>
+            <a:off x="8535365" y="128016"/>
+            <a:ext cx="201168" cy="201168"/>
+          </a:xfrm>
+          <a:prstGeom prst="rect">
+            <a:avLst/>
+          </a:prstGeom>
+        </p:spPr>
+      </p:pic>
+      <p:sp>
+        <p:nvSpPr>
+          <p:cNvPr id="24" name="Text 19"/>
+          <p:cNvSpPr txBox="1"/>
+          <p:nvPr/>
+        </p:nvSpPr>
+        <p:spPr>
+          <a:xfrm>
+            <a:off x="8791397" y="91440"/>
+            <a:ext cx="752602" cy="274320"/>
+          </a:xfrm>
+          <a:prstGeom prst="rect">
+            <a:avLst/>
+          </a:prstGeom>
+          <a:noFill/>
+          <a:ln/>
+        </p:spPr>
+        <p:txBody>
+          <a:bodyPr wrap="square" lIns="0" tIns="0" rIns="0" bIns="0" rtlCol="0" anchor="ctr"/>
+          <a:lstStyle/>
+          <a:p>
+            <a:pPr indent="0" marL="0">
+              <a:buNone/>
+            </a:pPr>
+            <a:r>
+              <a:rPr lang="en-US" sz="1100" b="1" dirty="0">
+                <a:solidFill>
+                  <a:srgbClr val="92400E"/>
+                </a:solidFill>
+                <a:latin typeface="Calibri" pitchFamily="34" charset="0"/>
+                <a:ea typeface="Calibri" pitchFamily="34" charset="-122"/>
+                <a:cs typeface="Calibri" pitchFamily="34" charset="-120"/>
+              </a:rPr>
+              <a:t>USE NOW</a:t>
+            </a:r>
+            <a:endParaRPr lang="en-US" sz="1100" dirty="0"/>
+          </a:p>
+        </p:txBody>
+      </p:sp>
+      <p:sp>
+        <p:nvSpPr>
+          <p:cNvPr id="25" name="Shape 20"/>
+          <p:cNvSpPr/>
+          <p:nvPr/>
+        </p:nvSpPr>
+        <p:spPr>
+          <a:xfrm>
+            <a:off x="6518097" y="91440"/>
+            <a:ext cx="1779524" cy="274320"/>
+          </a:xfrm>
+          <a:prstGeom prst="rect">
+            <a:avLst/>
+          </a:prstGeom>
+          <a:solidFill>
+            <a:srgbClr val="E0F2FE"/>
+          </a:solidFill>
+          <a:ln w="12700">
+            <a:solidFill>
+              <a:srgbClr val="0369A1"/>
+            </a:solidFill>
+            <a:prstDash val="solid"/>
+          </a:ln>
+        </p:spPr>
+      </p:sp>
+      <p:sp>
+        <p:nvSpPr>
+          <p:cNvPr id="26" name="Shape 21"/>
+          <p:cNvSpPr/>
+          <p:nvPr/>
+        </p:nvSpPr>
+        <p:spPr>
+          <a:xfrm>
+            <a:off x="6518097" y="91440"/>
+            <a:ext cx="73152" cy="274320"/>
+          </a:xfrm>
+          <a:prstGeom prst="rect">
+            <a:avLst/>
+          </a:prstGeom>
+          <a:solidFill>
+            <a:srgbClr val="0369A1"/>
+          </a:solidFill>
+          <a:ln w="12700">
+            <a:solidFill>
+              <a:srgbClr val="0369A1"/>
+            </a:solidFill>
+            <a:prstDash val="solid"/>
+          </a:ln>
+        </p:spPr>
+      </p:sp>
+      <p:pic>
+        <p:nvPicPr>
+          <p:cNvPr id="27" name="Image 3" descr="preencoded.png">    </p:cNvPr>
+          <p:cNvPicPr>
+            <a:picLocks noChangeAspect="1"/>
+          </p:cNvPicPr>
+          <p:nvPr/>
+        </p:nvPicPr>
+        <p:blipFill>
+          <a:blip r:embed="rId4"/>
+          <a:stretch>
+            <a:fillRect/>
+          </a:stretch>
+        </p:blipFill>
+        <p:spPr>
+          <a:xfrm>
+            <a:off x="6646113" y="128016"/>
+            <a:ext cx="201168" cy="201168"/>
+          </a:xfrm>
+          <a:prstGeom prst="rect">
+            <a:avLst/>
+          </a:prstGeom>
+        </p:spPr>
+      </p:pic>
+      <p:sp>
+        <p:nvSpPr>
+          <p:cNvPr id="28" name="Text 22"/>
+          <p:cNvSpPr txBox="1"/>
+          <p:nvPr/>
+        </p:nvSpPr>
+        <p:spPr>
+          <a:xfrm>
+            <a:off x="6902145" y="91440"/>
+            <a:ext cx="1358900" cy="274320"/>
+          </a:xfrm>
+          <a:prstGeom prst="rect">
+            <a:avLst/>
+          </a:prstGeom>
+          <a:noFill/>
+          <a:ln/>
+        </p:spPr>
+        <p:txBody>
+          <a:bodyPr wrap="square" lIns="0" tIns="0" rIns="0" bIns="0" rtlCol="0" anchor="ctr"/>
+          <a:lstStyle/>
+          <a:p>
+            <a:pPr indent="0" marL="0">
+              <a:buNone/>
+            </a:pPr>
+            <a:r>
+              <a:rPr lang="en-US" sz="1100" b="1" dirty="0">
+                <a:solidFill>
+                  <a:srgbClr val="075985"/>
+                </a:solidFill>
+                <a:latin typeface="Calibri" pitchFamily="34" charset="0"/>
+                <a:ea typeface="Calibri" pitchFamily="34" charset="-122"/>
+                <a:cs typeface="Calibri" pitchFamily="34" charset="-120"/>
+              </a:rPr>
+              <a:t>UNDERSTAND NOW</a:t>
+            </a:r>
+            <a:endParaRPr lang="en-US" sz="1100" dirty="0"/>
+          </a:p>
+        </p:txBody>
+      </p:sp>
+      <p:sp>
+        <p:nvSpPr>
           <p:cNvPr id="25" name="Slide Number Placeholder 0"/>
           <p:cNvSpPr>
             <a:spLocks noGrp="1"/>
@@ -3259,6 +3687,158 @@
       </p:sp>
       <p:sp>
         <p:nvSpPr>
+          <p:cNvPr id="5" name="Shape 3"/>
+          <p:cNvSpPr/>
+          <p:nvPr/>
+        </p:nvSpPr>
+        <p:spPr>
+          <a:xfrm>
+            <a:off x="8959672" y="91440"/>
+            <a:ext cx="2683383" cy="274320"/>
+          </a:xfrm>
+          <a:prstGeom prst="rect">
+            <a:avLst/>
+          </a:prstGeom>
+          <a:solidFill>
+            <a:srgbClr val="FEF3C7"/>
+          </a:solidFill>
+          <a:ln w="12700">
+            <a:solidFill>
+              <a:srgbClr val="B45309"/>
+            </a:solidFill>
+            <a:prstDash val="solid"/>
+          </a:ln>
+        </p:spPr>
+      </p:sp>
+      <p:sp>
+        <p:nvSpPr>
+          <p:cNvPr id="6" name="Shape 4"/>
+          <p:cNvSpPr/>
+          <p:nvPr/>
+        </p:nvSpPr>
+        <p:spPr>
+          <a:xfrm>
+            <a:off x="8959672" y="91440"/>
+            <a:ext cx="27432" cy="274320"/>
+          </a:xfrm>
+          <a:prstGeom prst="rect">
+            <a:avLst/>
+          </a:prstGeom>
+          <a:solidFill>
+            <a:srgbClr val="B45309"/>
+          </a:solidFill>
+          <a:ln w="12700">
+            <a:solidFill>
+              <a:srgbClr val="B45309"/>
+            </a:solidFill>
+            <a:prstDash val="solid"/>
+          </a:ln>
+        </p:spPr>
+      </p:sp>
+      <p:sp>
+        <p:nvSpPr>
+          <p:cNvPr id="7" name="Shape 5"/>
+          <p:cNvSpPr/>
+          <p:nvPr/>
+        </p:nvSpPr>
+        <p:spPr>
+          <a:xfrm>
+            <a:off x="9014536" y="91440"/>
+            <a:ext cx="27432" cy="274320"/>
+          </a:xfrm>
+          <a:prstGeom prst="rect">
+            <a:avLst/>
+          </a:prstGeom>
+          <a:solidFill>
+            <a:srgbClr val="B45309"/>
+          </a:solidFill>
+          <a:ln w="12700">
+            <a:solidFill>
+              <a:srgbClr val="B45309"/>
+            </a:solidFill>
+            <a:prstDash val="solid"/>
+          </a:ln>
+        </p:spPr>
+      </p:sp>
+      <p:pic>
+        <p:nvPicPr>
+          <p:cNvPr id="8" name="Image 0" descr="preencoded.png">    </p:cNvPr>
+          <p:cNvPicPr>
+            <a:picLocks noChangeAspect="1"/>
+          </p:cNvPicPr>
+          <p:nvPr/>
+        </p:nvPicPr>
+        <p:blipFill>
+          <a:blip r:embed="rId1"/>
+          <a:stretch>
+            <a:fillRect/>
+          </a:stretch>
+        </p:blipFill>
+        <p:spPr>
+          <a:xfrm>
+            <a:off x="9087688" y="128016"/>
+            <a:ext cx="201168" cy="201168"/>
+          </a:xfrm>
+          <a:prstGeom prst="rect">
+            <a:avLst/>
+          </a:prstGeom>
+        </p:spPr>
+      </p:pic>
+      <p:sp>
+        <p:nvSpPr>
+          <p:cNvPr id="9" name="Text 6"/>
+          <p:cNvSpPr txBox="1"/>
+          <p:nvPr/>
+        </p:nvSpPr>
+        <p:spPr>
+          <a:xfrm>
+            <a:off x="9343720" y="91440"/>
+            <a:ext cx="2262759" cy="274320"/>
+          </a:xfrm>
+          <a:prstGeom prst="rect">
+            <a:avLst/>
+          </a:prstGeom>
+          <a:noFill/>
+          <a:ln/>
+        </p:spPr>
+        <p:txBody>
+          <a:bodyPr wrap="square" lIns="0" tIns="0" rIns="0" bIns="0" rtlCol="0" anchor="ctr"/>
+          <a:lstStyle/>
+          <a:p>
+            <a:pPr indent="0" marL="0">
+              <a:buNone/>
+            </a:pPr>
+            <a:r>
+              <a:rPr lang="en-US" sz="1100" b="1" dirty="0">
+                <a:solidFill>
+                  <a:srgbClr val="92400E"/>
+                </a:solidFill>
+                <a:latin typeface="Calibri" pitchFamily="34" charset="0"/>
+                <a:ea typeface="Calibri" pitchFamily="34" charset="-122"/>
+                <a:cs typeface="Calibri" pitchFamily="34" charset="-120"/>
+              </a:rPr>
+              <a:t>USE NOW</a:t>
+            </a:r>
+            <a:pPr indent="0" marL="0">
+              <a:buNone/>
+            </a:pPr>
+            <a:r>
+              <a:rPr lang="en-US" sz="1100" dirty="0">
+                <a:solidFill>
+                  <a:srgbClr val="92400E"/>
+                </a:solidFill>
+                <a:latin typeface="Calibri" pitchFamily="34" charset="0"/>
+                <a:ea typeface="Calibri" pitchFamily="34" charset="-122"/>
+                <a:cs typeface="Calibri" pitchFamily="34" charset="-120"/>
+              </a:rPr>
+              <a:t> · the complete program</a:t>
+            </a:r>
+            <a:endParaRPr lang="en-US" sz="1100" dirty="0"/>
+          </a:p>
+        </p:txBody>
+      </p:sp>
+      <p:sp>
+        <p:nvSpPr>
           <p:cNvPr id="25" name="Slide Number Placeholder 0"/>
           <p:cNvSpPr>
             <a:spLocks noGrp="1"/>
@@ -4412,6 +4992,158 @@
       </p:sp>
       <p:sp>
         <p:nvSpPr>
+          <p:cNvPr id="17" name="Shape 15"/>
+          <p:cNvSpPr/>
+          <p:nvPr/>
+        </p:nvSpPr>
+        <p:spPr>
+          <a:xfrm>
+            <a:off x="9287967" y="91440"/>
+            <a:ext cx="2355088" cy="274320"/>
+          </a:xfrm>
+          <a:prstGeom prst="rect">
+            <a:avLst/>
+          </a:prstGeom>
+          <a:solidFill>
+            <a:srgbClr val="FEF3C7"/>
+          </a:solidFill>
+          <a:ln w="12700">
+            <a:solidFill>
+              <a:srgbClr val="B45309"/>
+            </a:solidFill>
+            <a:prstDash val="solid"/>
+          </a:ln>
+        </p:spPr>
+      </p:sp>
+      <p:sp>
+        <p:nvSpPr>
+          <p:cNvPr id="18" name="Shape 16"/>
+          <p:cNvSpPr/>
+          <p:nvPr/>
+        </p:nvSpPr>
+        <p:spPr>
+          <a:xfrm>
+            <a:off x="9287967" y="91440"/>
+            <a:ext cx="27432" cy="274320"/>
+          </a:xfrm>
+          <a:prstGeom prst="rect">
+            <a:avLst/>
+          </a:prstGeom>
+          <a:solidFill>
+            <a:srgbClr val="B45309"/>
+          </a:solidFill>
+          <a:ln w="12700">
+            <a:solidFill>
+              <a:srgbClr val="B45309"/>
+            </a:solidFill>
+            <a:prstDash val="solid"/>
+          </a:ln>
+        </p:spPr>
+      </p:sp>
+      <p:sp>
+        <p:nvSpPr>
+          <p:cNvPr id="19" name="Shape 17"/>
+          <p:cNvSpPr/>
+          <p:nvPr/>
+        </p:nvSpPr>
+        <p:spPr>
+          <a:xfrm>
+            <a:off x="9342831" y="91440"/>
+            <a:ext cx="27432" cy="274320"/>
+          </a:xfrm>
+          <a:prstGeom prst="rect">
+            <a:avLst/>
+          </a:prstGeom>
+          <a:solidFill>
+            <a:srgbClr val="B45309"/>
+          </a:solidFill>
+          <a:ln w="12700">
+            <a:solidFill>
+              <a:srgbClr val="B45309"/>
+            </a:solidFill>
+            <a:prstDash val="solid"/>
+          </a:ln>
+        </p:spPr>
+      </p:sp>
+      <p:pic>
+        <p:nvPicPr>
+          <p:cNvPr id="20" name="Image 0" descr="preencoded.png">    </p:cNvPr>
+          <p:cNvPicPr>
+            <a:picLocks noChangeAspect="1"/>
+          </p:cNvPicPr>
+          <p:nvPr/>
+        </p:nvPicPr>
+        <p:blipFill>
+          <a:blip r:embed="rId1"/>
+          <a:stretch>
+            <a:fillRect/>
+          </a:stretch>
+        </p:blipFill>
+        <p:spPr>
+          <a:xfrm>
+            <a:off x="9415983" y="128016"/>
+            <a:ext cx="201168" cy="201168"/>
+          </a:xfrm>
+          <a:prstGeom prst="rect">
+            <a:avLst/>
+          </a:prstGeom>
+        </p:spPr>
+      </p:pic>
+      <p:sp>
+        <p:nvSpPr>
+          <p:cNvPr id="21" name="Text 18"/>
+          <p:cNvSpPr txBox="1"/>
+          <p:nvPr/>
+        </p:nvSpPr>
+        <p:spPr>
+          <a:xfrm>
+            <a:off x="9672015" y="91440"/>
+            <a:ext cx="1934464" cy="274320"/>
+          </a:xfrm>
+          <a:prstGeom prst="rect">
+            <a:avLst/>
+          </a:prstGeom>
+          <a:noFill/>
+          <a:ln/>
+        </p:spPr>
+        <p:txBody>
+          <a:bodyPr wrap="square" lIns="0" tIns="0" rIns="0" bIns="0" rtlCol="0" anchor="ctr"/>
+          <a:lstStyle/>
+          <a:p>
+            <a:pPr indent="0" marL="0">
+              <a:buNone/>
+            </a:pPr>
+            <a:r>
+              <a:rPr lang="en-US" sz="1100" b="1" dirty="0">
+                <a:solidFill>
+                  <a:srgbClr val="92400E"/>
+                </a:solidFill>
+                <a:latin typeface="Calibri" pitchFamily="34" charset="0"/>
+                <a:ea typeface="Calibri" pitchFamily="34" charset="-122"/>
+                <a:cs typeface="Calibri" pitchFamily="34" charset="-120"/>
+              </a:rPr>
+              <a:t>USE NOW</a:t>
+            </a:r>
+            <a:pPr indent="0" marL="0">
+              <a:buNone/>
+            </a:pPr>
+            <a:r>
+              <a:rPr lang="en-US" sz="1100" dirty="0">
+                <a:solidFill>
+                  <a:srgbClr val="92400E"/>
+                </a:solidFill>
+                <a:latin typeface="Calibri" pitchFamily="34" charset="0"/>
+                <a:ea typeface="Calibri" pitchFamily="34" charset="-122"/>
+                <a:cs typeface="Calibri" pitchFamily="34" charset="-120"/>
+              </a:rPr>
+              <a:t> · the PRG32 tools</a:t>
+            </a:r>
+            <a:endParaRPr lang="en-US" sz="1100" dirty="0"/>
+          </a:p>
+        </p:txBody>
+      </p:sp>
+      <p:sp>
+        <p:nvSpPr>
           <p:cNvPr id="25" name="Slide Number Placeholder 0"/>
           <p:cNvSpPr>
             <a:spLocks noGrp="1"/>
@@ -5248,6 +5980,158 @@
       </p:sp>
       <p:sp>
         <p:nvSpPr>
+          <p:cNvPr id="17" name="Shape 15"/>
+          <p:cNvSpPr/>
+          <p:nvPr/>
+        </p:nvSpPr>
+        <p:spPr>
+          <a:xfrm>
+            <a:off x="9287967" y="91440"/>
+            <a:ext cx="2355088" cy="274320"/>
+          </a:xfrm>
+          <a:prstGeom prst="rect">
+            <a:avLst/>
+          </a:prstGeom>
+          <a:solidFill>
+            <a:srgbClr val="FEF3C7"/>
+          </a:solidFill>
+          <a:ln w="12700">
+            <a:solidFill>
+              <a:srgbClr val="B45309"/>
+            </a:solidFill>
+            <a:prstDash val="solid"/>
+          </a:ln>
+        </p:spPr>
+      </p:sp>
+      <p:sp>
+        <p:nvSpPr>
+          <p:cNvPr id="18" name="Shape 16"/>
+          <p:cNvSpPr/>
+          <p:nvPr/>
+        </p:nvSpPr>
+        <p:spPr>
+          <a:xfrm>
+            <a:off x="9287967" y="91440"/>
+            <a:ext cx="27432" cy="274320"/>
+          </a:xfrm>
+          <a:prstGeom prst="rect">
+            <a:avLst/>
+          </a:prstGeom>
+          <a:solidFill>
+            <a:srgbClr val="B45309"/>
+          </a:solidFill>
+          <a:ln w="12700">
+            <a:solidFill>
+              <a:srgbClr val="B45309"/>
+            </a:solidFill>
+            <a:prstDash val="solid"/>
+          </a:ln>
+        </p:spPr>
+      </p:sp>
+      <p:sp>
+        <p:nvSpPr>
+          <p:cNvPr id="19" name="Shape 17"/>
+          <p:cNvSpPr/>
+          <p:nvPr/>
+        </p:nvSpPr>
+        <p:spPr>
+          <a:xfrm>
+            <a:off x="9342831" y="91440"/>
+            <a:ext cx="27432" cy="274320"/>
+          </a:xfrm>
+          <a:prstGeom prst="rect">
+            <a:avLst/>
+          </a:prstGeom>
+          <a:solidFill>
+            <a:srgbClr val="B45309"/>
+          </a:solidFill>
+          <a:ln w="12700">
+            <a:solidFill>
+              <a:srgbClr val="B45309"/>
+            </a:solidFill>
+            <a:prstDash val="solid"/>
+          </a:ln>
+        </p:spPr>
+      </p:sp>
+      <p:pic>
+        <p:nvPicPr>
+          <p:cNvPr id="20" name="Image 0" descr="preencoded.png">    </p:cNvPr>
+          <p:cNvPicPr>
+            <a:picLocks noChangeAspect="1"/>
+          </p:cNvPicPr>
+          <p:nvPr/>
+        </p:nvPicPr>
+        <p:blipFill>
+          <a:blip r:embed="rId1"/>
+          <a:stretch>
+            <a:fillRect/>
+          </a:stretch>
+        </p:blipFill>
+        <p:spPr>
+          <a:xfrm>
+            <a:off x="9415983" y="128016"/>
+            <a:ext cx="201168" cy="201168"/>
+          </a:xfrm>
+          <a:prstGeom prst="rect">
+            <a:avLst/>
+          </a:prstGeom>
+        </p:spPr>
+      </p:pic>
+      <p:sp>
+        <p:nvSpPr>
+          <p:cNvPr id="21" name="Text 18"/>
+          <p:cNvSpPr txBox="1"/>
+          <p:nvPr/>
+        </p:nvSpPr>
+        <p:spPr>
+          <a:xfrm>
+            <a:off x="9672015" y="91440"/>
+            <a:ext cx="1934464" cy="274320"/>
+          </a:xfrm>
+          <a:prstGeom prst="rect">
+            <a:avLst/>
+          </a:prstGeom>
+          <a:noFill/>
+          <a:ln/>
+        </p:spPr>
+        <p:txBody>
+          <a:bodyPr wrap="square" lIns="0" tIns="0" rIns="0" bIns="0" rtlCol="0" anchor="ctr"/>
+          <a:lstStyle/>
+          <a:p>
+            <a:pPr indent="0" marL="0">
+              <a:buNone/>
+            </a:pPr>
+            <a:r>
+              <a:rPr lang="en-US" sz="1100" b="1" dirty="0">
+                <a:solidFill>
+                  <a:srgbClr val="92400E"/>
+                </a:solidFill>
+                <a:latin typeface="Calibri" pitchFamily="34" charset="0"/>
+                <a:ea typeface="Calibri" pitchFamily="34" charset="-122"/>
+                <a:cs typeface="Calibri" pitchFamily="34" charset="-120"/>
+              </a:rPr>
+              <a:t>USE NOW</a:t>
+            </a:r>
+            <a:pPr indent="0" marL="0">
+              <a:buNone/>
+            </a:pPr>
+            <a:r>
+              <a:rPr lang="en-US" sz="1100" dirty="0">
+                <a:solidFill>
+                  <a:srgbClr val="92400E"/>
+                </a:solidFill>
+                <a:latin typeface="Calibri" pitchFamily="34" charset="0"/>
+                <a:ea typeface="Calibri" pitchFamily="34" charset="-122"/>
+                <a:cs typeface="Calibri" pitchFamily="34" charset="-120"/>
+              </a:rPr>
+              <a:t> · the PRG32 tools</a:t>
+            </a:r>
+            <a:endParaRPr lang="en-US" sz="1100" dirty="0"/>
+          </a:p>
+        </p:txBody>
+      </p:sp>
+      <p:sp>
+        <p:nvSpPr>
           <p:cNvPr id="25" name="Slide Number Placeholder 0"/>
           <p:cNvSpPr>
             <a:spLocks noGrp="1"/>
@@ -6079,6 +6963,158 @@
               <a:t>A black screen: check the wiring of the display against the firmware</a:t>
             </a:r>
             <a:endParaRPr lang="en-US" sz="1200" dirty="0"/>
+          </a:p>
+        </p:txBody>
+      </p:sp>
+      <p:sp>
+        <p:nvSpPr>
+          <p:cNvPr id="17" name="Shape 15"/>
+          <p:cNvSpPr/>
+          <p:nvPr/>
+        </p:nvSpPr>
+        <p:spPr>
+          <a:xfrm>
+            <a:off x="9287967" y="91440"/>
+            <a:ext cx="2355088" cy="274320"/>
+          </a:xfrm>
+          <a:prstGeom prst="rect">
+            <a:avLst/>
+          </a:prstGeom>
+          <a:solidFill>
+            <a:srgbClr val="FEF3C7"/>
+          </a:solidFill>
+          <a:ln w="12700">
+            <a:solidFill>
+              <a:srgbClr val="B45309"/>
+            </a:solidFill>
+            <a:prstDash val="solid"/>
+          </a:ln>
+        </p:spPr>
+      </p:sp>
+      <p:sp>
+        <p:nvSpPr>
+          <p:cNvPr id="18" name="Shape 16"/>
+          <p:cNvSpPr/>
+          <p:nvPr/>
+        </p:nvSpPr>
+        <p:spPr>
+          <a:xfrm>
+            <a:off x="9287967" y="91440"/>
+            <a:ext cx="27432" cy="274320"/>
+          </a:xfrm>
+          <a:prstGeom prst="rect">
+            <a:avLst/>
+          </a:prstGeom>
+          <a:solidFill>
+            <a:srgbClr val="B45309"/>
+          </a:solidFill>
+          <a:ln w="12700">
+            <a:solidFill>
+              <a:srgbClr val="B45309"/>
+            </a:solidFill>
+            <a:prstDash val="solid"/>
+          </a:ln>
+        </p:spPr>
+      </p:sp>
+      <p:sp>
+        <p:nvSpPr>
+          <p:cNvPr id="19" name="Shape 17"/>
+          <p:cNvSpPr/>
+          <p:nvPr/>
+        </p:nvSpPr>
+        <p:spPr>
+          <a:xfrm>
+            <a:off x="9342831" y="91440"/>
+            <a:ext cx="27432" cy="274320"/>
+          </a:xfrm>
+          <a:prstGeom prst="rect">
+            <a:avLst/>
+          </a:prstGeom>
+          <a:solidFill>
+            <a:srgbClr val="B45309"/>
+          </a:solidFill>
+          <a:ln w="12700">
+            <a:solidFill>
+              <a:srgbClr val="B45309"/>
+            </a:solidFill>
+            <a:prstDash val="solid"/>
+          </a:ln>
+        </p:spPr>
+      </p:sp>
+      <p:pic>
+        <p:nvPicPr>
+          <p:cNvPr id="20" name="Image 0" descr="preencoded.png">    </p:cNvPr>
+          <p:cNvPicPr>
+            <a:picLocks noChangeAspect="1"/>
+          </p:cNvPicPr>
+          <p:nvPr/>
+        </p:nvPicPr>
+        <p:blipFill>
+          <a:blip r:embed="rId1"/>
+          <a:stretch>
+            <a:fillRect/>
+          </a:stretch>
+        </p:blipFill>
+        <p:spPr>
+          <a:xfrm>
+            <a:off x="9415983" y="128016"/>
+            <a:ext cx="201168" cy="201168"/>
+          </a:xfrm>
+          <a:prstGeom prst="rect">
+            <a:avLst/>
+          </a:prstGeom>
+        </p:spPr>
+      </p:pic>
+      <p:sp>
+        <p:nvSpPr>
+          <p:cNvPr id="21" name="Text 18"/>
+          <p:cNvSpPr txBox="1"/>
+          <p:nvPr/>
+        </p:nvSpPr>
+        <p:spPr>
+          <a:xfrm>
+            <a:off x="9672015" y="91440"/>
+            <a:ext cx="1934464" cy="274320"/>
+          </a:xfrm>
+          <a:prstGeom prst="rect">
+            <a:avLst/>
+          </a:prstGeom>
+          <a:noFill/>
+          <a:ln/>
+        </p:spPr>
+        <p:txBody>
+          <a:bodyPr wrap="square" lIns="0" tIns="0" rIns="0" bIns="0" rtlCol="0" anchor="ctr"/>
+          <a:lstStyle/>
+          <a:p>
+            <a:pPr indent="0" marL="0">
+              <a:buNone/>
+            </a:pPr>
+            <a:r>
+              <a:rPr lang="en-US" sz="1100" b="1" dirty="0">
+                <a:solidFill>
+                  <a:srgbClr val="92400E"/>
+                </a:solidFill>
+                <a:latin typeface="Calibri" pitchFamily="34" charset="0"/>
+                <a:ea typeface="Calibri" pitchFamily="34" charset="-122"/>
+                <a:cs typeface="Calibri" pitchFamily="34" charset="-120"/>
+              </a:rPr>
+              <a:t>USE NOW</a:t>
+            </a:r>
+            <a:pPr indent="0" marL="0">
+              <a:buNone/>
+            </a:pPr>
+            <a:r>
+              <a:rPr lang="en-US" sz="1100" dirty="0">
+                <a:solidFill>
+                  <a:srgbClr val="92400E"/>
+                </a:solidFill>
+                <a:latin typeface="Calibri" pitchFamily="34" charset="0"/>
+                <a:ea typeface="Calibri" pitchFamily="34" charset="-122"/>
+                <a:cs typeface="Calibri" pitchFamily="34" charset="-120"/>
+              </a:rPr>
+              <a:t> · the PRG32 tools</a:t>
+            </a:r>
+            <a:endParaRPr lang="en-US" sz="1100" dirty="0"/>
           </a:p>
         </p:txBody>
       </p:sp>
@@ -7465,6 +8501,158 @@
       </p:graphicFrame>
       <p:sp>
         <p:nvSpPr>
+          <p:cNvPr id="4" name="Shape 1"/>
+          <p:cNvSpPr/>
+          <p:nvPr/>
+        </p:nvSpPr>
+        <p:spPr>
+          <a:xfrm>
+            <a:off x="9287967" y="91440"/>
+            <a:ext cx="2355088" cy="274320"/>
+          </a:xfrm>
+          <a:prstGeom prst="rect">
+            <a:avLst/>
+          </a:prstGeom>
+          <a:solidFill>
+            <a:srgbClr val="FEF3C7"/>
+          </a:solidFill>
+          <a:ln w="12700">
+            <a:solidFill>
+              <a:srgbClr val="B45309"/>
+            </a:solidFill>
+            <a:prstDash val="solid"/>
+          </a:ln>
+        </p:spPr>
+      </p:sp>
+      <p:sp>
+        <p:nvSpPr>
+          <p:cNvPr id="5" name="Shape 2"/>
+          <p:cNvSpPr/>
+          <p:nvPr/>
+        </p:nvSpPr>
+        <p:spPr>
+          <a:xfrm>
+            <a:off x="9287967" y="91440"/>
+            <a:ext cx="27432" cy="274320"/>
+          </a:xfrm>
+          <a:prstGeom prst="rect">
+            <a:avLst/>
+          </a:prstGeom>
+          <a:solidFill>
+            <a:srgbClr val="B45309"/>
+          </a:solidFill>
+          <a:ln w="12700">
+            <a:solidFill>
+              <a:srgbClr val="B45309"/>
+            </a:solidFill>
+            <a:prstDash val="solid"/>
+          </a:ln>
+        </p:spPr>
+      </p:sp>
+      <p:sp>
+        <p:nvSpPr>
+          <p:cNvPr id="6" name="Shape 3"/>
+          <p:cNvSpPr/>
+          <p:nvPr/>
+        </p:nvSpPr>
+        <p:spPr>
+          <a:xfrm>
+            <a:off x="9342831" y="91440"/>
+            <a:ext cx="27432" cy="274320"/>
+          </a:xfrm>
+          <a:prstGeom prst="rect">
+            <a:avLst/>
+          </a:prstGeom>
+          <a:solidFill>
+            <a:srgbClr val="B45309"/>
+          </a:solidFill>
+          <a:ln w="12700">
+            <a:solidFill>
+              <a:srgbClr val="B45309"/>
+            </a:solidFill>
+            <a:prstDash val="solid"/>
+          </a:ln>
+        </p:spPr>
+      </p:sp>
+      <p:pic>
+        <p:nvPicPr>
+          <p:cNvPr id="7" name="Image 0" descr="preencoded.png">    </p:cNvPr>
+          <p:cNvPicPr>
+            <a:picLocks noChangeAspect="1"/>
+          </p:cNvPicPr>
+          <p:nvPr/>
+        </p:nvPicPr>
+        <p:blipFill>
+          <a:blip r:embed="rId1"/>
+          <a:stretch>
+            <a:fillRect/>
+          </a:stretch>
+        </p:blipFill>
+        <p:spPr>
+          <a:xfrm>
+            <a:off x="9415983" y="128016"/>
+            <a:ext cx="201168" cy="201168"/>
+          </a:xfrm>
+          <a:prstGeom prst="rect">
+            <a:avLst/>
+          </a:prstGeom>
+        </p:spPr>
+      </p:pic>
+      <p:sp>
+        <p:nvSpPr>
+          <p:cNvPr id="8" name="Text 4"/>
+          <p:cNvSpPr txBox="1"/>
+          <p:nvPr/>
+        </p:nvSpPr>
+        <p:spPr>
+          <a:xfrm>
+            <a:off x="9672015" y="91440"/>
+            <a:ext cx="1934464" cy="274320"/>
+          </a:xfrm>
+          <a:prstGeom prst="rect">
+            <a:avLst/>
+          </a:prstGeom>
+          <a:noFill/>
+          <a:ln/>
+        </p:spPr>
+        <p:txBody>
+          <a:bodyPr wrap="square" lIns="0" tIns="0" rIns="0" bIns="0" rtlCol="0" anchor="ctr"/>
+          <a:lstStyle/>
+          <a:p>
+            <a:pPr indent="0" marL="0">
+              <a:buNone/>
+            </a:pPr>
+            <a:r>
+              <a:rPr lang="en-US" sz="1100" b="1" dirty="0">
+                <a:solidFill>
+                  <a:srgbClr val="92400E"/>
+                </a:solidFill>
+                <a:latin typeface="Calibri" pitchFamily="34" charset="0"/>
+                <a:ea typeface="Calibri" pitchFamily="34" charset="-122"/>
+                <a:cs typeface="Calibri" pitchFamily="34" charset="-120"/>
+              </a:rPr>
+              <a:t>USE NOW</a:t>
+            </a:r>
+            <a:pPr indent="0" marL="0">
+              <a:buNone/>
+            </a:pPr>
+            <a:r>
+              <a:rPr lang="en-US" sz="1100" dirty="0">
+                <a:solidFill>
+                  <a:srgbClr val="92400E"/>
+                </a:solidFill>
+                <a:latin typeface="Calibri" pitchFamily="34" charset="0"/>
+                <a:ea typeface="Calibri" pitchFamily="34" charset="-122"/>
+                <a:cs typeface="Calibri" pitchFamily="34" charset="-120"/>
+              </a:rPr>
+              <a:t> · the PRG32 tools</a:t>
+            </a:r>
+            <a:endParaRPr lang="en-US" sz="1100" dirty="0"/>
+          </a:p>
+        </p:txBody>
+      </p:sp>
+      <p:sp>
+        <p:nvSpPr>
           <p:cNvPr id="25" name="Slide Number Placeholder 0"/>
           <p:cNvSpPr>
             <a:spLocks noGrp="1"/>
@@ -9576,6 +10764,133 @@
       </p:sp>
       <p:sp>
         <p:nvSpPr>
+          <p:cNvPr id="17" name="Shape 15"/>
+          <p:cNvSpPr/>
+          <p:nvPr/>
+        </p:nvSpPr>
+        <p:spPr>
+          <a:xfrm>
+            <a:off x="8878646" y="91440"/>
+            <a:ext cx="2764409" cy="274320"/>
+          </a:xfrm>
+          <a:prstGeom prst="rect">
+            <a:avLst/>
+          </a:prstGeom>
+          <a:solidFill>
+            <a:srgbClr val="E0F2FE"/>
+          </a:solidFill>
+          <a:ln w="12700">
+            <a:solidFill>
+              <a:srgbClr val="0369A1"/>
+            </a:solidFill>
+            <a:prstDash val="solid"/>
+          </a:ln>
+        </p:spPr>
+      </p:sp>
+      <p:sp>
+        <p:nvSpPr>
+          <p:cNvPr id="18" name="Shape 16"/>
+          <p:cNvSpPr/>
+          <p:nvPr/>
+        </p:nvSpPr>
+        <p:spPr>
+          <a:xfrm>
+            <a:off x="8878646" y="91440"/>
+            <a:ext cx="73152" cy="274320"/>
+          </a:xfrm>
+          <a:prstGeom prst="rect">
+            <a:avLst/>
+          </a:prstGeom>
+          <a:solidFill>
+            <a:srgbClr val="0369A1"/>
+          </a:solidFill>
+          <a:ln w="12700">
+            <a:solidFill>
+              <a:srgbClr val="0369A1"/>
+            </a:solidFill>
+            <a:prstDash val="solid"/>
+          </a:ln>
+        </p:spPr>
+      </p:sp>
+      <p:pic>
+        <p:nvPicPr>
+          <p:cNvPr id="19" name="Image 0" descr="preencoded.png">    </p:cNvPr>
+          <p:cNvPicPr>
+            <a:picLocks noChangeAspect="1"/>
+          </p:cNvPicPr>
+          <p:nvPr/>
+        </p:nvPicPr>
+        <p:blipFill>
+          <a:blip r:embed="rId1"/>
+          <a:stretch>
+            <a:fillRect/>
+          </a:stretch>
+        </p:blipFill>
+        <p:spPr>
+          <a:xfrm>
+            <a:off x="9006662" y="128016"/>
+            <a:ext cx="201168" cy="201168"/>
+          </a:xfrm>
+          <a:prstGeom prst="rect">
+            <a:avLst/>
+          </a:prstGeom>
+        </p:spPr>
+      </p:pic>
+      <p:sp>
+        <p:nvSpPr>
+          <p:cNvPr id="20" name="Text 17"/>
+          <p:cNvSpPr txBox="1"/>
+          <p:nvPr/>
+        </p:nvSpPr>
+        <p:spPr>
+          <a:xfrm>
+            <a:off x="9262694" y="91440"/>
+            <a:ext cx="2343785" cy="274320"/>
+          </a:xfrm>
+          <a:prstGeom prst="rect">
+            <a:avLst/>
+          </a:prstGeom>
+          <a:noFill/>
+          <a:ln/>
+        </p:spPr>
+        <p:txBody>
+          <a:bodyPr wrap="square" lIns="0" tIns="0" rIns="0" bIns="0" rtlCol="0" anchor="ctr"/>
+          <a:lstStyle/>
+          <a:p>
+            <a:pPr indent="0" marL="0">
+              <a:buNone/>
+            </a:pPr>
+            <a:r>
+              <a:rPr lang="en-US" sz="1100" b="1" dirty="0">
+                <a:solidFill>
+                  <a:srgbClr val="075985"/>
+                </a:solidFill>
+                <a:latin typeface="Calibri" pitchFamily="34" charset="0"/>
+                <a:ea typeface="Calibri" pitchFamily="34" charset="-122"/>
+                <a:cs typeface="Calibri" pitchFamily="34" charset="-120"/>
+              </a:rPr>
+              <a:t>UNDERSTAND NOW</a:t>
+            </a:r>
+            <a:pPr indent="0" marL="0">
+              <a:buNone/>
+            </a:pPr>
+            <a:r>
+              <a:rPr lang="en-US" sz="1100" dirty="0">
+                <a:solidFill>
+                  <a:srgbClr val="075985"/>
+                </a:solidFill>
+                <a:latin typeface="Calibri" pitchFamily="34" charset="0"/>
+                <a:ea typeface="Calibri" pitchFamily="34" charset="-122"/>
+                <a:cs typeface="Calibri" pitchFamily="34" charset="-120"/>
+              </a:rPr>
+              <a:t> · multiplexers</a:t>
+            </a:r>
+            <a:endParaRPr lang="en-US" sz="1100" dirty="0"/>
+          </a:p>
+        </p:txBody>
+      </p:sp>
+      <p:sp>
+        <p:nvSpPr>
           <p:cNvPr id="25" name="Slide Number Placeholder 0"/>
           <p:cNvSpPr>
             <a:spLocks noGrp="1"/>
@@ -13367,6 +14682,133 @@
       </p:sp>
       <p:sp>
         <p:nvSpPr>
+          <p:cNvPr id="93" name="Shape 91"/>
+          <p:cNvSpPr/>
+          <p:nvPr/>
+        </p:nvSpPr>
+        <p:spPr>
+          <a:xfrm>
+            <a:off x="8287715" y="91440"/>
+            <a:ext cx="3355340" cy="274320"/>
+          </a:xfrm>
+          <a:prstGeom prst="rect">
+            <a:avLst/>
+          </a:prstGeom>
+          <a:solidFill>
+            <a:srgbClr val="E0F2FE"/>
+          </a:solidFill>
+          <a:ln w="12700">
+            <a:solidFill>
+              <a:srgbClr val="0369A1"/>
+            </a:solidFill>
+            <a:prstDash val="solid"/>
+          </a:ln>
+        </p:spPr>
+      </p:sp>
+      <p:sp>
+        <p:nvSpPr>
+          <p:cNvPr id="94" name="Shape 92"/>
+          <p:cNvSpPr/>
+          <p:nvPr/>
+        </p:nvSpPr>
+        <p:spPr>
+          <a:xfrm>
+            <a:off x="8287715" y="91440"/>
+            <a:ext cx="73152" cy="274320"/>
+          </a:xfrm>
+          <a:prstGeom prst="rect">
+            <a:avLst/>
+          </a:prstGeom>
+          <a:solidFill>
+            <a:srgbClr val="0369A1"/>
+          </a:solidFill>
+          <a:ln w="12700">
+            <a:solidFill>
+              <a:srgbClr val="0369A1"/>
+            </a:solidFill>
+            <a:prstDash val="solid"/>
+          </a:ln>
+        </p:spPr>
+      </p:sp>
+      <p:pic>
+        <p:nvPicPr>
+          <p:cNvPr id="95" name="Image 0" descr="preencoded.png">    </p:cNvPr>
+          <p:cNvPicPr>
+            <a:picLocks noChangeAspect="1"/>
+          </p:cNvPicPr>
+          <p:nvPr/>
+        </p:nvPicPr>
+        <p:blipFill>
+          <a:blip r:embed="rId1"/>
+          <a:stretch>
+            <a:fillRect/>
+          </a:stretch>
+        </p:blipFill>
+        <p:spPr>
+          <a:xfrm>
+            <a:off x="8415731" y="128016"/>
+            <a:ext cx="201168" cy="201168"/>
+          </a:xfrm>
+          <a:prstGeom prst="rect">
+            <a:avLst/>
+          </a:prstGeom>
+        </p:spPr>
+      </p:pic>
+      <p:sp>
+        <p:nvSpPr>
+          <p:cNvPr id="96" name="Text 93"/>
+          <p:cNvSpPr txBox="1"/>
+          <p:nvPr/>
+        </p:nvSpPr>
+        <p:spPr>
+          <a:xfrm>
+            <a:off x="8671763" y="91440"/>
+            <a:ext cx="2934716" cy="274320"/>
+          </a:xfrm>
+          <a:prstGeom prst="rect">
+            <a:avLst/>
+          </a:prstGeom>
+          <a:noFill/>
+          <a:ln/>
+        </p:spPr>
+        <p:txBody>
+          <a:bodyPr wrap="square" lIns="0" tIns="0" rIns="0" bIns="0" rtlCol="0" anchor="ctr"/>
+          <a:lstStyle/>
+          <a:p>
+            <a:pPr indent="0" marL="0">
+              <a:buNone/>
+            </a:pPr>
+            <a:r>
+              <a:rPr lang="en-US" sz="1100" b="1" dirty="0">
+                <a:solidFill>
+                  <a:srgbClr val="075985"/>
+                </a:solidFill>
+                <a:latin typeface="Calibri" pitchFamily="34" charset="0"/>
+                <a:ea typeface="Calibri" pitchFamily="34" charset="-122"/>
+                <a:cs typeface="Calibri" pitchFamily="34" charset="-120"/>
+              </a:rPr>
+              <a:t>UNDERSTAND NOW</a:t>
+            </a:r>
+            <a:pPr indent="0" marL="0">
+              <a:buNone/>
+            </a:pPr>
+            <a:r>
+              <a:rPr lang="en-US" sz="1100" dirty="0">
+                <a:solidFill>
+                  <a:srgbClr val="075985"/>
+                </a:solidFill>
+                <a:latin typeface="Calibri" pitchFamily="34" charset="0"/>
+                <a:ea typeface="Calibri" pitchFamily="34" charset="-122"/>
+                <a:cs typeface="Calibri" pitchFamily="34" charset="-120"/>
+              </a:rPr>
+              <a:t> · decoders and encoders</a:t>
+            </a:r>
+            <a:endParaRPr lang="en-US" sz="1100" dirty="0"/>
+          </a:p>
+        </p:txBody>
+      </p:sp>
+      <p:sp>
+        <p:nvSpPr>
           <p:cNvPr id="25" name="Slide Number Placeholder 0"/>
           <p:cNvSpPr>
             <a:spLocks noGrp="1"/>
@@ -14413,6 +15855,133 @@
       </p:sp>
       <p:sp>
         <p:nvSpPr>
+          <p:cNvPr id="28" name="Shape 26"/>
+          <p:cNvSpPr/>
+          <p:nvPr/>
+        </p:nvSpPr>
+        <p:spPr>
+          <a:xfrm>
+            <a:off x="8878646" y="91440"/>
+            <a:ext cx="2764409" cy="274320"/>
+          </a:xfrm>
+          <a:prstGeom prst="rect">
+            <a:avLst/>
+          </a:prstGeom>
+          <a:solidFill>
+            <a:srgbClr val="E0F2FE"/>
+          </a:solidFill>
+          <a:ln w="12700">
+            <a:solidFill>
+              <a:srgbClr val="0369A1"/>
+            </a:solidFill>
+            <a:prstDash val="solid"/>
+          </a:ln>
+        </p:spPr>
+      </p:sp>
+      <p:sp>
+        <p:nvSpPr>
+          <p:cNvPr id="29" name="Shape 27"/>
+          <p:cNvSpPr/>
+          <p:nvPr/>
+        </p:nvSpPr>
+        <p:spPr>
+          <a:xfrm>
+            <a:off x="8878646" y="91440"/>
+            <a:ext cx="73152" cy="274320"/>
+          </a:xfrm>
+          <a:prstGeom prst="rect">
+            <a:avLst/>
+          </a:prstGeom>
+          <a:solidFill>
+            <a:srgbClr val="0369A1"/>
+          </a:solidFill>
+          <a:ln w="12700">
+            <a:solidFill>
+              <a:srgbClr val="0369A1"/>
+            </a:solidFill>
+            <a:prstDash val="solid"/>
+          </a:ln>
+        </p:spPr>
+      </p:sp>
+      <p:pic>
+        <p:nvPicPr>
+          <p:cNvPr id="30" name="Image 0" descr="preencoded.png">    </p:cNvPr>
+          <p:cNvPicPr>
+            <a:picLocks noChangeAspect="1"/>
+          </p:cNvPicPr>
+          <p:nvPr/>
+        </p:nvPicPr>
+        <p:blipFill>
+          <a:blip r:embed="rId1"/>
+          <a:stretch>
+            <a:fillRect/>
+          </a:stretch>
+        </p:blipFill>
+        <p:spPr>
+          <a:xfrm>
+            <a:off x="9006662" y="128016"/>
+            <a:ext cx="201168" cy="201168"/>
+          </a:xfrm>
+          <a:prstGeom prst="rect">
+            <a:avLst/>
+          </a:prstGeom>
+        </p:spPr>
+      </p:pic>
+      <p:sp>
+        <p:nvSpPr>
+          <p:cNvPr id="31" name="Text 28"/>
+          <p:cNvSpPr txBox="1"/>
+          <p:nvPr/>
+        </p:nvSpPr>
+        <p:spPr>
+          <a:xfrm>
+            <a:off x="9262694" y="91440"/>
+            <a:ext cx="2343785" cy="274320"/>
+          </a:xfrm>
+          <a:prstGeom prst="rect">
+            <a:avLst/>
+          </a:prstGeom>
+          <a:noFill/>
+          <a:ln/>
+        </p:spPr>
+        <p:txBody>
+          <a:bodyPr wrap="square" lIns="0" tIns="0" rIns="0" bIns="0" rtlCol="0" anchor="ctr"/>
+          <a:lstStyle/>
+          <a:p>
+            <a:pPr indent="0" marL="0">
+              <a:buNone/>
+            </a:pPr>
+            <a:r>
+              <a:rPr lang="en-US" sz="1100" b="1" dirty="0">
+                <a:solidFill>
+                  <a:srgbClr val="075985"/>
+                </a:solidFill>
+                <a:latin typeface="Calibri" pitchFamily="34" charset="0"/>
+                <a:ea typeface="Calibri" pitchFamily="34" charset="-122"/>
+                <a:cs typeface="Calibri" pitchFamily="34" charset="-120"/>
+              </a:rPr>
+              <a:t>UNDERSTAND NOW</a:t>
+            </a:r>
+            <a:pPr indent="0" marL="0">
+              <a:buNone/>
+            </a:pPr>
+            <a:r>
+              <a:rPr lang="en-US" sz="1100" dirty="0">
+                <a:solidFill>
+                  <a:srgbClr val="075985"/>
+                </a:solidFill>
+                <a:latin typeface="Calibri" pitchFamily="34" charset="0"/>
+                <a:ea typeface="Calibri" pitchFamily="34" charset="-122"/>
+                <a:cs typeface="Calibri" pitchFamily="34" charset="-120"/>
+              </a:rPr>
+              <a:t> · multiplexers</a:t>
+            </a:r>
+            <a:endParaRPr lang="en-US" sz="1100" dirty="0"/>
+          </a:p>
+        </p:txBody>
+      </p:sp>
+      <p:sp>
+        <p:nvSpPr>
           <p:cNvPr id="25" name="Slide Number Placeholder 0"/>
           <p:cNvSpPr>
             <a:spLocks noGrp="1"/>
@@ -15119,6 +16688,133 @@
               <a:t>The same value appended to the byte makes its total parity even</a:t>
             </a:r>
             <a:endParaRPr lang="en-US" sz="1700" dirty="0"/>
+          </a:p>
+        </p:txBody>
+      </p:sp>
+      <p:sp>
+        <p:nvSpPr>
+          <p:cNvPr id="14" name="Shape 12"/>
+          <p:cNvSpPr/>
+          <p:nvPr/>
+        </p:nvSpPr>
+        <p:spPr>
+          <a:xfrm>
+            <a:off x="8222056" y="91440"/>
+            <a:ext cx="3420999" cy="274320"/>
+          </a:xfrm>
+          <a:prstGeom prst="rect">
+            <a:avLst/>
+          </a:prstGeom>
+          <a:solidFill>
+            <a:srgbClr val="E0F2FE"/>
+          </a:solidFill>
+          <a:ln w="12700">
+            <a:solidFill>
+              <a:srgbClr val="0369A1"/>
+            </a:solidFill>
+            <a:prstDash val="solid"/>
+          </a:ln>
+        </p:spPr>
+      </p:sp>
+      <p:sp>
+        <p:nvSpPr>
+          <p:cNvPr id="15" name="Shape 13"/>
+          <p:cNvSpPr/>
+          <p:nvPr/>
+        </p:nvSpPr>
+        <p:spPr>
+          <a:xfrm>
+            <a:off x="8222056" y="91440"/>
+            <a:ext cx="73152" cy="274320"/>
+          </a:xfrm>
+          <a:prstGeom prst="rect">
+            <a:avLst/>
+          </a:prstGeom>
+          <a:solidFill>
+            <a:srgbClr val="0369A1"/>
+          </a:solidFill>
+          <a:ln w="12700">
+            <a:solidFill>
+              <a:srgbClr val="0369A1"/>
+            </a:solidFill>
+            <a:prstDash val="solid"/>
+          </a:ln>
+        </p:spPr>
+      </p:sp>
+      <p:pic>
+        <p:nvPicPr>
+          <p:cNvPr id="16" name="Image 0" descr="preencoded.png">    </p:cNvPr>
+          <p:cNvPicPr>
+            <a:picLocks noChangeAspect="1"/>
+          </p:cNvPicPr>
+          <p:nvPr/>
+        </p:nvPicPr>
+        <p:blipFill>
+          <a:blip r:embed="rId1"/>
+          <a:stretch>
+            <a:fillRect/>
+          </a:stretch>
+        </p:blipFill>
+        <p:spPr>
+          <a:xfrm>
+            <a:off x="8350072" y="128016"/>
+            <a:ext cx="201168" cy="201168"/>
+          </a:xfrm>
+          <a:prstGeom prst="rect">
+            <a:avLst/>
+          </a:prstGeom>
+        </p:spPr>
+      </p:pic>
+      <p:sp>
+        <p:nvSpPr>
+          <p:cNvPr id="17" name="Text 14"/>
+          <p:cNvSpPr txBox="1"/>
+          <p:nvPr/>
+        </p:nvSpPr>
+        <p:spPr>
+          <a:xfrm>
+            <a:off x="8606104" y="91440"/>
+            <a:ext cx="3000375" cy="274320"/>
+          </a:xfrm>
+          <a:prstGeom prst="rect">
+            <a:avLst/>
+          </a:prstGeom>
+          <a:noFill/>
+          <a:ln/>
+        </p:spPr>
+        <p:txBody>
+          <a:bodyPr wrap="square" lIns="0" tIns="0" rIns="0" bIns="0" rtlCol="0" anchor="ctr"/>
+          <a:lstStyle/>
+          <a:p>
+            <a:pPr indent="0" marL="0">
+              <a:buNone/>
+            </a:pPr>
+            <a:r>
+              <a:rPr lang="en-US" sz="1100" b="1" dirty="0">
+                <a:solidFill>
+                  <a:srgbClr val="075985"/>
+                </a:solidFill>
+                <a:latin typeface="Calibri" pitchFamily="34" charset="0"/>
+                <a:ea typeface="Calibri" pitchFamily="34" charset="-122"/>
+                <a:cs typeface="Calibri" pitchFamily="34" charset="-120"/>
+              </a:rPr>
+              <a:t>UNDERSTAND NOW</a:t>
+            </a:r>
+            <a:pPr indent="0" marL="0">
+              <a:buNone/>
+            </a:pPr>
+            <a:r>
+              <a:rPr lang="en-US" sz="1100" dirty="0">
+                <a:solidFill>
+                  <a:srgbClr val="075985"/>
+                </a:solidFill>
+                <a:latin typeface="Calibri" pitchFamily="34" charset="0"/>
+                <a:ea typeface="Calibri" pitchFamily="34" charset="-122"/>
+                <a:cs typeface="Calibri" pitchFamily="34" charset="-120"/>
+              </a:rPr>
+              <a:t> · comparators and parity</a:t>
+            </a:r>
+            <a:endParaRPr lang="en-US" sz="1100" dirty="0"/>
           </a:p>
         </p:txBody>
       </p:sp>
@@ -17501,6 +19197,133 @@
       </p:sp>
       <p:sp>
         <p:nvSpPr>
+          <p:cNvPr id="5" name="Shape 2"/>
+          <p:cNvSpPr/>
+          <p:nvPr/>
+        </p:nvSpPr>
+        <p:spPr>
+          <a:xfrm>
+            <a:off x="9206941" y="91440"/>
+            <a:ext cx="2436114" cy="274320"/>
+          </a:xfrm>
+          <a:prstGeom prst="rect">
+            <a:avLst/>
+          </a:prstGeom>
+          <a:solidFill>
+            <a:srgbClr val="E0F2FE"/>
+          </a:solidFill>
+          <a:ln w="12700">
+            <a:solidFill>
+              <a:srgbClr val="0369A1"/>
+            </a:solidFill>
+            <a:prstDash val="solid"/>
+          </a:ln>
+        </p:spPr>
+      </p:sp>
+      <p:sp>
+        <p:nvSpPr>
+          <p:cNvPr id="6" name="Shape 3"/>
+          <p:cNvSpPr/>
+          <p:nvPr/>
+        </p:nvSpPr>
+        <p:spPr>
+          <a:xfrm>
+            <a:off x="9206941" y="91440"/>
+            <a:ext cx="73152" cy="274320"/>
+          </a:xfrm>
+          <a:prstGeom prst="rect">
+            <a:avLst/>
+          </a:prstGeom>
+          <a:solidFill>
+            <a:srgbClr val="0369A1"/>
+          </a:solidFill>
+          <a:ln w="12700">
+            <a:solidFill>
+              <a:srgbClr val="0369A1"/>
+            </a:solidFill>
+            <a:prstDash val="solid"/>
+          </a:ln>
+        </p:spPr>
+      </p:sp>
+      <p:pic>
+        <p:nvPicPr>
+          <p:cNvPr id="7" name="Image 0" descr="preencoded.png">    </p:cNvPr>
+          <p:cNvPicPr>
+            <a:picLocks noChangeAspect="1"/>
+          </p:cNvPicPr>
+          <p:nvPr/>
+        </p:nvPicPr>
+        <p:blipFill>
+          <a:blip r:embed="rId1"/>
+          <a:stretch>
+            <a:fillRect/>
+          </a:stretch>
+        </p:blipFill>
+        <p:spPr>
+          <a:xfrm>
+            <a:off x="9334957" y="128016"/>
+            <a:ext cx="201168" cy="201168"/>
+          </a:xfrm>
+          <a:prstGeom prst="rect">
+            <a:avLst/>
+          </a:prstGeom>
+        </p:spPr>
+      </p:pic>
+      <p:sp>
+        <p:nvSpPr>
+          <p:cNvPr id="8" name="Text 4"/>
+          <p:cNvSpPr txBox="1"/>
+          <p:nvPr/>
+        </p:nvSpPr>
+        <p:spPr>
+          <a:xfrm>
+            <a:off x="9590989" y="91440"/>
+            <a:ext cx="2015490" cy="274320"/>
+          </a:xfrm>
+          <a:prstGeom prst="rect">
+            <a:avLst/>
+          </a:prstGeom>
+          <a:noFill/>
+          <a:ln/>
+        </p:spPr>
+        <p:txBody>
+          <a:bodyPr wrap="square" lIns="0" tIns="0" rIns="0" bIns="0" rtlCol="0" anchor="ctr"/>
+          <a:lstStyle/>
+          <a:p>
+            <a:pPr indent="0" marL="0">
+              <a:buNone/>
+            </a:pPr>
+            <a:r>
+              <a:rPr lang="en-US" sz="1100" b="1" dirty="0">
+                <a:solidFill>
+                  <a:srgbClr val="075985"/>
+                </a:solidFill>
+                <a:latin typeface="Calibri" pitchFamily="34" charset="0"/>
+                <a:ea typeface="Calibri" pitchFamily="34" charset="-122"/>
+                <a:cs typeface="Calibri" pitchFamily="34" charset="-120"/>
+              </a:rPr>
+              <a:t>UNDERSTAND NOW</a:t>
+            </a:r>
+            <a:pPr indent="0" marL="0">
+              <a:buNone/>
+            </a:pPr>
+            <a:r>
+              <a:rPr lang="en-US" sz="1100" dirty="0">
+                <a:solidFill>
+                  <a:srgbClr val="075985"/>
+                </a:solidFill>
+                <a:latin typeface="Calibri" pitchFamily="34" charset="0"/>
+                <a:ea typeface="Calibri" pitchFamily="34" charset="-122"/>
+                <a:cs typeface="Calibri" pitchFamily="34" charset="-120"/>
+              </a:rPr>
+              <a:t> · the ALU</a:t>
+            </a:r>
+            <a:endParaRPr lang="en-US" sz="1100" dirty="0"/>
+          </a:p>
+        </p:txBody>
+      </p:sp>
+      <p:sp>
+        <p:nvSpPr>
           <p:cNvPr id="25" name="Slide Number Placeholder 0"/>
           <p:cNvSpPr>
             <a:spLocks noGrp="1"/>
@@ -17987,6 +19810,158 @@
       </p:sp>
       <p:sp>
         <p:nvSpPr>
+          <p:cNvPr id="5" name="Shape 3"/>
+          <p:cNvSpPr/>
+          <p:nvPr/>
+        </p:nvSpPr>
+        <p:spPr>
+          <a:xfrm>
+            <a:off x="8959672" y="91440"/>
+            <a:ext cx="2683383" cy="274320"/>
+          </a:xfrm>
+          <a:prstGeom prst="rect">
+            <a:avLst/>
+          </a:prstGeom>
+          <a:solidFill>
+            <a:srgbClr val="FEF3C7"/>
+          </a:solidFill>
+          <a:ln w="12700">
+            <a:solidFill>
+              <a:srgbClr val="B45309"/>
+            </a:solidFill>
+            <a:prstDash val="solid"/>
+          </a:ln>
+        </p:spPr>
+      </p:sp>
+      <p:sp>
+        <p:nvSpPr>
+          <p:cNvPr id="6" name="Shape 4"/>
+          <p:cNvSpPr/>
+          <p:nvPr/>
+        </p:nvSpPr>
+        <p:spPr>
+          <a:xfrm>
+            <a:off x="8959672" y="91440"/>
+            <a:ext cx="27432" cy="274320"/>
+          </a:xfrm>
+          <a:prstGeom prst="rect">
+            <a:avLst/>
+          </a:prstGeom>
+          <a:solidFill>
+            <a:srgbClr val="B45309"/>
+          </a:solidFill>
+          <a:ln w="12700">
+            <a:solidFill>
+              <a:srgbClr val="B45309"/>
+            </a:solidFill>
+            <a:prstDash val="solid"/>
+          </a:ln>
+        </p:spPr>
+      </p:sp>
+      <p:sp>
+        <p:nvSpPr>
+          <p:cNvPr id="7" name="Shape 5"/>
+          <p:cNvSpPr/>
+          <p:nvPr/>
+        </p:nvSpPr>
+        <p:spPr>
+          <a:xfrm>
+            <a:off x="9014536" y="91440"/>
+            <a:ext cx="27432" cy="274320"/>
+          </a:xfrm>
+          <a:prstGeom prst="rect">
+            <a:avLst/>
+          </a:prstGeom>
+          <a:solidFill>
+            <a:srgbClr val="B45309"/>
+          </a:solidFill>
+          <a:ln w="12700">
+            <a:solidFill>
+              <a:srgbClr val="B45309"/>
+            </a:solidFill>
+            <a:prstDash val="solid"/>
+          </a:ln>
+        </p:spPr>
+      </p:sp>
+      <p:pic>
+        <p:nvPicPr>
+          <p:cNvPr id="8" name="Image 0" descr="preencoded.png">    </p:cNvPr>
+          <p:cNvPicPr>
+            <a:picLocks noChangeAspect="1"/>
+          </p:cNvPicPr>
+          <p:nvPr/>
+        </p:nvPicPr>
+        <p:blipFill>
+          <a:blip r:embed="rId1"/>
+          <a:stretch>
+            <a:fillRect/>
+          </a:stretch>
+        </p:blipFill>
+        <p:spPr>
+          <a:xfrm>
+            <a:off x="9087688" y="128016"/>
+            <a:ext cx="201168" cy="201168"/>
+          </a:xfrm>
+          <a:prstGeom prst="rect">
+            <a:avLst/>
+          </a:prstGeom>
+        </p:spPr>
+      </p:pic>
+      <p:sp>
+        <p:nvSpPr>
+          <p:cNvPr id="9" name="Text 6"/>
+          <p:cNvSpPr txBox="1"/>
+          <p:nvPr/>
+        </p:nvSpPr>
+        <p:spPr>
+          <a:xfrm>
+            <a:off x="9343720" y="91440"/>
+            <a:ext cx="2262759" cy="274320"/>
+          </a:xfrm>
+          <a:prstGeom prst="rect">
+            <a:avLst/>
+          </a:prstGeom>
+          <a:noFill/>
+          <a:ln/>
+        </p:spPr>
+        <p:txBody>
+          <a:bodyPr wrap="square" lIns="0" tIns="0" rIns="0" bIns="0" rtlCol="0" anchor="ctr"/>
+          <a:lstStyle/>
+          <a:p>
+            <a:pPr indent="0" marL="0">
+              <a:buNone/>
+            </a:pPr>
+            <a:r>
+              <a:rPr lang="en-US" sz="1100" b="1" dirty="0">
+                <a:solidFill>
+                  <a:srgbClr val="92400E"/>
+                </a:solidFill>
+                <a:latin typeface="Calibri" pitchFamily="34" charset="0"/>
+                <a:ea typeface="Calibri" pitchFamily="34" charset="-122"/>
+                <a:cs typeface="Calibri" pitchFamily="34" charset="-120"/>
+              </a:rPr>
+              <a:t>USE NOW</a:t>
+            </a:r>
+            <a:pPr indent="0" marL="0">
+              <a:buNone/>
+            </a:pPr>
+            <a:r>
+              <a:rPr lang="en-US" sz="1100" dirty="0">
+                <a:solidFill>
+                  <a:srgbClr val="92400E"/>
+                </a:solidFill>
+                <a:latin typeface="Calibri" pitchFamily="34" charset="0"/>
+                <a:ea typeface="Calibri" pitchFamily="34" charset="-122"/>
+                <a:cs typeface="Calibri" pitchFamily="34" charset="-120"/>
+              </a:rPr>
+              <a:t> · the complete program</a:t>
+            </a:r>
+            <a:endParaRPr lang="en-US" sz="1100" dirty="0"/>
+          </a:p>
+        </p:txBody>
+      </p:sp>
+      <p:sp>
+        <p:nvSpPr>
           <p:cNvPr id="25" name="Slide Number Placeholder 0"/>
           <p:cNvSpPr>
             <a:spLocks noGrp="1"/>
@@ -18651,6 +20626,158 @@
               <a:t>    lw   ra, 12(sp)</a:t>
             </a:r>
             <a:endParaRPr lang="en-US" sz="1200" dirty="0"/>
+          </a:p>
+        </p:txBody>
+      </p:sp>
+      <p:sp>
+        <p:nvSpPr>
+          <p:cNvPr id="5" name="Shape 3"/>
+          <p:cNvSpPr/>
+          <p:nvPr/>
+        </p:nvSpPr>
+        <p:spPr>
+          <a:xfrm>
+            <a:off x="8959672" y="91440"/>
+            <a:ext cx="2683383" cy="274320"/>
+          </a:xfrm>
+          <a:prstGeom prst="rect">
+            <a:avLst/>
+          </a:prstGeom>
+          <a:solidFill>
+            <a:srgbClr val="FEF3C7"/>
+          </a:solidFill>
+          <a:ln w="12700">
+            <a:solidFill>
+              <a:srgbClr val="B45309"/>
+            </a:solidFill>
+            <a:prstDash val="solid"/>
+          </a:ln>
+        </p:spPr>
+      </p:sp>
+      <p:sp>
+        <p:nvSpPr>
+          <p:cNvPr id="6" name="Shape 4"/>
+          <p:cNvSpPr/>
+          <p:nvPr/>
+        </p:nvSpPr>
+        <p:spPr>
+          <a:xfrm>
+            <a:off x="8959672" y="91440"/>
+            <a:ext cx="27432" cy="274320"/>
+          </a:xfrm>
+          <a:prstGeom prst="rect">
+            <a:avLst/>
+          </a:prstGeom>
+          <a:solidFill>
+            <a:srgbClr val="B45309"/>
+          </a:solidFill>
+          <a:ln w="12700">
+            <a:solidFill>
+              <a:srgbClr val="B45309"/>
+            </a:solidFill>
+            <a:prstDash val="solid"/>
+          </a:ln>
+        </p:spPr>
+      </p:sp>
+      <p:sp>
+        <p:nvSpPr>
+          <p:cNvPr id="7" name="Shape 5"/>
+          <p:cNvSpPr/>
+          <p:nvPr/>
+        </p:nvSpPr>
+        <p:spPr>
+          <a:xfrm>
+            <a:off x="9014536" y="91440"/>
+            <a:ext cx="27432" cy="274320"/>
+          </a:xfrm>
+          <a:prstGeom prst="rect">
+            <a:avLst/>
+          </a:prstGeom>
+          <a:solidFill>
+            <a:srgbClr val="B45309"/>
+          </a:solidFill>
+          <a:ln w="12700">
+            <a:solidFill>
+              <a:srgbClr val="B45309"/>
+            </a:solidFill>
+            <a:prstDash val="solid"/>
+          </a:ln>
+        </p:spPr>
+      </p:sp>
+      <p:pic>
+        <p:nvPicPr>
+          <p:cNvPr id="8" name="Image 0" descr="preencoded.png">    </p:cNvPr>
+          <p:cNvPicPr>
+            <a:picLocks noChangeAspect="1"/>
+          </p:cNvPicPr>
+          <p:nvPr/>
+        </p:nvPicPr>
+        <p:blipFill>
+          <a:blip r:embed="rId1"/>
+          <a:stretch>
+            <a:fillRect/>
+          </a:stretch>
+        </p:blipFill>
+        <p:spPr>
+          <a:xfrm>
+            <a:off x="9087688" y="128016"/>
+            <a:ext cx="201168" cy="201168"/>
+          </a:xfrm>
+          <a:prstGeom prst="rect">
+            <a:avLst/>
+          </a:prstGeom>
+        </p:spPr>
+      </p:pic>
+      <p:sp>
+        <p:nvSpPr>
+          <p:cNvPr id="9" name="Text 6"/>
+          <p:cNvSpPr txBox="1"/>
+          <p:nvPr/>
+        </p:nvSpPr>
+        <p:spPr>
+          <a:xfrm>
+            <a:off x="9343720" y="91440"/>
+            <a:ext cx="2262759" cy="274320"/>
+          </a:xfrm>
+          <a:prstGeom prst="rect">
+            <a:avLst/>
+          </a:prstGeom>
+          <a:noFill/>
+          <a:ln/>
+        </p:spPr>
+        <p:txBody>
+          <a:bodyPr wrap="square" lIns="0" tIns="0" rIns="0" bIns="0" rtlCol="0" anchor="ctr"/>
+          <a:lstStyle/>
+          <a:p>
+            <a:pPr indent="0" marL="0">
+              <a:buNone/>
+            </a:pPr>
+            <a:r>
+              <a:rPr lang="en-US" sz="1100" b="1" dirty="0">
+                <a:solidFill>
+                  <a:srgbClr val="92400E"/>
+                </a:solidFill>
+                <a:latin typeface="Calibri" pitchFamily="34" charset="0"/>
+                <a:ea typeface="Calibri" pitchFamily="34" charset="-122"/>
+                <a:cs typeface="Calibri" pitchFamily="34" charset="-120"/>
+              </a:rPr>
+              <a:t>USE NOW</a:t>
+            </a:r>
+            <a:pPr indent="0" marL="0">
+              <a:buNone/>
+            </a:pPr>
+            <a:r>
+              <a:rPr lang="en-US" sz="1100" dirty="0">
+                <a:solidFill>
+                  <a:srgbClr val="92400E"/>
+                </a:solidFill>
+                <a:latin typeface="Calibri" pitchFamily="34" charset="0"/>
+                <a:ea typeface="Calibri" pitchFamily="34" charset="-122"/>
+                <a:cs typeface="Calibri" pitchFamily="34" charset="-120"/>
+              </a:rPr>
+              <a:t> · the complete program</a:t>
+            </a:r>
+            <a:endParaRPr lang="en-US" sz="1100" dirty="0"/>
           </a:p>
         </p:txBody>
       </p:sp>

--- a/en/slides/11-Computer_Architecture-Combinational_Machines-Code.pptx
+++ b/en/slides/11-Computer_Architecture-Combinational_Machines-Code.pptx
@@ -122,45 +122,45 @@
   <p:extLst>
     <p:ext uri="{521415D9-36F7-43E2-AB2F-B90AF26B5E84}">
       <p14:sectionLst xmlns:p14="http://schemas.microsoft.com/office/powerpoint/2010/main">
-        <p14:section name="Opening" id="{fe16a62c-739c-0bd1-1bed-60b16071f147}">
+        <p14:section name="Opening" id="{2ca69b3c-ce17-59b2-e1fd-0c67b0bcf70b}">
           <p14:sldIdLst>
             <p14:sldId id="256"/>
             <p14:sldId id="257"/>
           </p14:sldIdLst>
         </p14:section>
-        <p14:section name="Warm-up on the machine" id="{3760031d-a6c8-535b-9442-21da3a6d9292}">
+        <p14:section name="Warm-up on the machine" id="{b71302e4-f9a2-a1c7-9b32-5ca5bc880db8}">
           <p14:sldIdLst>
             <p14:sldId id="258"/>
           </p14:sldIdLst>
         </p14:section>
-        <p14:section name="Decoders and encoders" id="{927138e5-9e9c-afcb-5f3a-e925a93b4425}">
+        <p14:section name="Decoders and encoders" id="{35c4eb16-bbc0-6bcc-9586-1c17d7d0117d}">
           <p14:sldIdLst>
             <p14:sldId id="259"/>
           </p14:sldIdLst>
         </p14:section>
-        <p14:section name="Multiplexers and demultiplexers" id="{a137d3b3-437e-d1fd-1828-fae37301856c}">
+        <p14:section name="Multiplexers and demultiplexers" id="{dfc8072f-1782-a7bc-855a-2c1736f09c8f}">
           <p14:sldIdLst>
             <p14:sldId id="260"/>
           </p14:sldIdLst>
         </p14:section>
-        <p14:section name="Comparing and checking" id="{76be95a5-a696-b03b-795d-4a87c19d4a51}">
+        <p14:section name="Comparing and checking" id="{a2ad67c0-86fd-1700-4e35-98aaa7f1cbb4}">
           <p14:sldIdLst>
             <p14:sldId id="261"/>
           </p14:sldIdLst>
         </p14:section>
-        <p14:section name="The arithmetic logic unit" id="{3fb44611-d72e-9a7d-ae76-007f53efa2e9}">
+        <p14:section name="The arithmetic logic unit" id="{e1bb0e1b-df1c-1e24-b751-9cef9f5ff1af}">
           <p14:sldIdLst>
             <p14:sldId id="262"/>
           </p14:sldIdLst>
         </p14:section>
-        <p14:section name="The complete program" id="{77192457-ce09-7896-9c6d-5e0114ccd41c}">
+        <p14:section name="The complete program" id="{aad89901-ec84-fca9-e756-181a4daae636}">
           <p14:sldIdLst>
             <p14:sldId id="263"/>
             <p14:sldId id="264"/>
             <p14:sldId id="265"/>
           </p14:sldIdLst>
         </p14:section>
-        <p14:section name="Run it and test it" id="{d0d7e8ce-d825-a446-be72-6777824253a6}">
+        <p14:section name="Run it and test it" id="{980fd77c-847d-f1d4-8a05-7c3e18b62a04}">
           <p14:sldIdLst>
             <p14:sldId id="266"/>
             <p14:sldId id="267"/>
@@ -169,7 +169,7 @@
             <p14:sldId id="270"/>
           </p14:sldIdLst>
         </p14:section>
-        <p14:section name="Exercises" id="{ce163c1f-87a4-6649-4139-0ca02517e7ec}">
+        <p14:section name="Exercises" id="{35969327-288b-66bb-cc82-9096ecc90794}">
           <p14:sldIdLst>
             <p14:sldId id="271"/>
           </p14:sldIdLst>
